--- a/Защита дипломной работы.pptx
+++ b/Защита дипломной работы.pptx
@@ -11,38 +11,20 @@
     <p:sldId id="256" r:id="rId3"/>
     <p:sldId id="257" r:id="rId5"/>
     <p:sldId id="258" r:id="rId6"/>
-    <p:sldId id="259" r:id="rId7"/>
-    <p:sldId id="261" r:id="rId8"/>
-    <p:sldId id="262" r:id="rId9"/>
+    <p:sldId id="263" r:id="rId7"/>
+    <p:sldId id="259" r:id="rId8"/>
+    <p:sldId id="261" r:id="rId9"/>
+    <p:sldId id="262" r:id="rId10"/>
   </p:sldIdLst>
   <p:sldSz cx="12192000" cy="6858000"/>
   <p:notesSz cx="6858000" cy="9144000"/>
   <p:embeddedFontLst>
     <p:embeddedFont>
       <p:font typeface="Calibri" panose="020F0502020204030204"/>
-      <p:regular r:id="rId13"/>
-      <p:bold r:id="rId14"/>
-      <p:italic r:id="rId15"/>
-      <p:boldItalic r:id="rId16"/>
-    </p:embeddedFont>
-    <p:embeddedFont>
-      <p:font typeface="Open Sans"/>
-      <p:regular r:id="rId17"/>
-      <p:bold r:id="rId18"/>
-      <p:italic r:id="rId19"/>
-      <p:boldItalic r:id="rId20"/>
-    </p:embeddedFont>
-    <p:embeddedFont>
-      <p:font typeface="Open Sans SemiBold"/>
-      <p:regular r:id="rId21"/>
-      <p:bold r:id="rId22"/>
-      <p:italic r:id="rId23"/>
-      <p:boldItalic r:id="rId24"/>
-    </p:embeddedFont>
-    <p:embeddedFont>
-      <p:font typeface="Montserrat"/>
-      <p:regular r:id="rId25"/>
-      <p:bold r:id="rId26"/>
+      <p:regular r:id="rId14"/>
+      <p:bold r:id="rId15"/>
+      <p:italic r:id="rId16"/>
+      <p:boldItalic r:id="rId17"/>
     </p:embeddedFont>
   </p:embeddedFontLst>
   <p:defaultTextStyle>
@@ -277,7 +259,7 @@
   <p:extLst>
     <p:ext uri="{EFAFB233-063F-42B5-8137-9DF3F51BA10A}">
       <p15:sldGuideLst xmlns:p15="http://schemas.microsoft.com/office/powerpoint/2012/main">
-        <p15:guide id="1" orient="horz" pos="2160" userDrawn="1">
+        <p15:guide id="1" orient="horz" pos="2154" userDrawn="1">
           <p15:clr>
             <a:srgbClr val="000000"/>
           </p15:clr>
@@ -303,7 +285,7 @@
     </p:bg>
     <p:spTree>
       <p:nvGrpSpPr>
-        <p:cNvPr id="2" name="Shape 2"/>
+        <p:cNvPr id="1" name="Shape 2"/>
         <p:cNvGrpSpPr/>
         <p:nvPr/>
       </p:nvGrpSpPr>
@@ -318,7 +300,9 @@
       <p:sp>
         <p:nvSpPr>
           <p:cNvPr id="3" name="Google Shape;3;n"/>
-          <p:cNvSpPr/>
+          <p:cNvSpPr>
+            <a:spLocks noGrp="1" noRot="1" noChangeAspect="1"/>
+          </p:cNvSpPr>
           <p:nvPr>
             <p:ph type="sldImg" idx="2"/>
           </p:nvPr>
@@ -367,7 +351,9 @@
       <p:sp>
         <p:nvSpPr>
           <p:cNvPr id="4" name="Google Shape;4;n"/>
-          <p:cNvSpPr txBox="1"/>
+          <p:cNvSpPr txBox="1">
+            <a:spLocks noGrp="1"/>
+          </p:cNvSpPr>
           <p:nvPr>
             <p:ph type="body" idx="1"/>
           </p:nvPr>
@@ -733,7 +719,7 @@
   <p:cSld>
     <p:spTree>
       <p:nvGrpSpPr>
-        <p:cNvPr id="80" name="Shape 80"/>
+        <p:cNvPr id="1" name="Shape 80"/>
         <p:cNvGrpSpPr/>
         <p:nvPr/>
       </p:nvGrpSpPr>
@@ -748,7 +734,9 @@
       <p:sp>
         <p:nvSpPr>
           <p:cNvPr id="81" name="Google Shape;81;p1:notes"/>
-          <p:cNvSpPr txBox="1"/>
+          <p:cNvSpPr txBox="1">
+            <a:spLocks noGrp="1"/>
+          </p:cNvSpPr>
           <p:nvPr>
             <p:ph type="body" idx="1"/>
           </p:nvPr>
@@ -783,7 +771,119 @@
       <p:sp>
         <p:nvSpPr>
           <p:cNvPr id="82" name="Google Shape;82;p1:notes"/>
-          <p:cNvSpPr/>
+          <p:cNvSpPr>
+            <a:spLocks noGrp="1" noRot="1" noChangeAspect="1"/>
+          </p:cNvSpPr>
+          <p:nvPr>
+            <p:ph type="sldImg" idx="2"/>
+          </p:nvPr>
+        </p:nvSpPr>
+        <p:spPr>
+          <a:xfrm>
+            <a:off x="381000" y="685800"/>
+            <a:ext cx="6096000" cy="3429000"/>
+          </a:xfrm>
+          <a:custGeom>
+            <a:avLst/>
+            <a:gdLst/>
+            <a:ahLst/>
+            <a:cxnLst/>
+            <a:rect l="l" t="t" r="r" b="b"/>
+            <a:pathLst>
+              <a:path w="120000" h="120000" extrusionOk="0">
+                <a:moveTo>
+                  <a:pt x="0" y="0"/>
+                </a:moveTo>
+                <a:lnTo>
+                  <a:pt x="120000" y="0"/>
+                </a:lnTo>
+                <a:lnTo>
+                  <a:pt x="120000" y="120000"/>
+                </a:lnTo>
+                <a:lnTo>
+                  <a:pt x="0" y="120000"/>
+                </a:lnTo>
+                <a:close/>
+              </a:path>
+            </a:pathLst>
+          </a:custGeom>
+        </p:spPr>
+        <p:txBody>
+          <a:bodyPr/>
+          <a:lstStyle/>
+          <a:p>
+            <a:endParaRPr lang="ru-RU"/>
+          </a:p>
+        </p:txBody>
+      </p:sp>
+    </p:spTree>
+  </p:cSld>
+  <p:clrMapOvr>
+    <a:masterClrMapping/>
+  </p:clrMapOvr>
+</p:notes>
+</file>
+
+<file path=ppt/notesSlides/notesSlide2.xml><?xml version="1.0" encoding="utf-8"?>
+<p:notes xmlns:a="http://schemas.openxmlformats.org/drawingml/2006/main" xmlns:r="http://schemas.openxmlformats.org/officeDocument/2006/relationships" xmlns:p="http://schemas.openxmlformats.org/presentationml/2006/main" showMasterPhAnim="0" showMasterSp="0">
+  <p:cSld>
+    <p:spTree>
+      <p:nvGrpSpPr>
+        <p:cNvPr id="1" name="Shape 91"/>
+        <p:cNvGrpSpPr/>
+        <p:nvPr/>
+      </p:nvGrpSpPr>
+      <p:grpSpPr>
+        <a:xfrm>
+          <a:off x="0" y="0"/>
+          <a:ext cx="0" cy="0"/>
+          <a:chOff x="0" y="0"/>
+          <a:chExt cx="0" cy="0"/>
+        </a:xfrm>
+      </p:grpSpPr>
+      <p:sp>
+        <p:nvSpPr>
+          <p:cNvPr id="92" name="Google Shape;92;p2:notes"/>
+          <p:cNvSpPr txBox="1">
+            <a:spLocks noGrp="1"/>
+          </p:cNvSpPr>
+          <p:nvPr>
+            <p:ph type="body" idx="1"/>
+          </p:nvPr>
+        </p:nvSpPr>
+        <p:spPr>
+          <a:xfrm>
+            <a:off x="685800" y="4343400"/>
+            <a:ext cx="5486400" cy="4114800"/>
+          </a:xfrm>
+          <a:prstGeom prst="rect">
+            <a:avLst/>
+          </a:prstGeom>
+        </p:spPr>
+        <p:txBody>
+          <a:bodyPr spcFirstLastPara="1" wrap="square" lIns="91425" tIns="91425" rIns="91425" bIns="91425" anchor="t" anchorCtr="0">
+            <a:noAutofit/>
+          </a:bodyPr>
+          <a:lstStyle/>
+          <a:p>
+            <a:pPr marL="0" lvl="0" indent="0" algn="l" rtl="0">
+              <a:spcBef>
+                <a:spcPts val="0"/>
+              </a:spcBef>
+              <a:spcAft>
+                <a:spcPts val="0"/>
+              </a:spcAft>
+              <a:buNone/>
+            </a:pPr>
+          </a:p>
+        </p:txBody>
+      </p:sp>
+      <p:sp>
+        <p:nvSpPr>
+          <p:cNvPr id="93" name="Google Shape;93;p2:notes"/>
+          <p:cNvSpPr>
+            <a:spLocks noGrp="1" noRot="1" noChangeAspect="1"/>
+          </p:cNvSpPr>
           <p:nvPr>
             <p:ph type="sldImg" idx="2"/>
           </p:nvPr>
@@ -818,6 +918,13 @@
             </a:pathLst>
           </a:custGeom>
         </p:spPr>
+        <p:txBody>
+          <a:bodyPr/>
+          <a:lstStyle/>
+          <a:p>
+            <a:endParaRPr lang="ru-RU"/>
+          </a:p>
+        </p:txBody>
       </p:sp>
     </p:spTree>
   </p:cSld>
@@ -827,12 +934,12 @@
 </p:notes>
 </file>
 
-<file path=ppt/notesSlides/notesSlide2.xml><?xml version="1.0" encoding="utf-8"?>
+<file path=ppt/notesSlides/notesSlide3.xml><?xml version="1.0" encoding="utf-8"?>
 <p:notes xmlns:a="http://schemas.openxmlformats.org/drawingml/2006/main" xmlns:r="http://schemas.openxmlformats.org/officeDocument/2006/relationships" xmlns:p="http://schemas.openxmlformats.org/presentationml/2006/main" showMasterPhAnim="0" showMasterSp="0">
   <p:cSld>
     <p:spTree>
       <p:nvGrpSpPr>
-        <p:cNvPr id="91" name="Shape 91"/>
+        <p:cNvPr id="1" name="Shape 110"/>
         <p:cNvGrpSpPr/>
         <p:nvPr/>
       </p:nvGrpSpPr>
@@ -846,8 +953,10 @@
       </p:grpSpPr>
       <p:sp>
         <p:nvSpPr>
-          <p:cNvPr id="92" name="Google Shape;92;p2:notes"/>
-          <p:cNvSpPr txBox="1"/>
+          <p:cNvPr id="111" name="Google Shape;111;p3:notes"/>
+          <p:cNvSpPr txBox="1">
+            <a:spLocks noGrp="1"/>
+          </p:cNvSpPr>
           <p:nvPr>
             <p:ph type="body" idx="1"/>
           </p:nvPr>
@@ -881,8 +990,10 @@
       </p:sp>
       <p:sp>
         <p:nvSpPr>
-          <p:cNvPr id="93" name="Google Shape;93;p2:notes"/>
-          <p:cNvSpPr/>
+          <p:cNvPr id="112" name="Google Shape;112;p3:notes"/>
+          <p:cNvSpPr>
+            <a:spLocks noGrp="1" noRot="1" noChangeAspect="1"/>
+          </p:cNvSpPr>
           <p:nvPr>
             <p:ph type="sldImg" idx="2"/>
           </p:nvPr>
@@ -917,6 +1028,13 @@
             </a:pathLst>
           </a:custGeom>
         </p:spPr>
+        <p:txBody>
+          <a:bodyPr/>
+          <a:lstStyle/>
+          <a:p>
+            <a:endParaRPr lang="ru-RU"/>
+          </a:p>
+        </p:txBody>
       </p:sp>
     </p:spTree>
   </p:cSld>
@@ -926,12 +1044,12 @@
 </p:notes>
 </file>
 
-<file path=ppt/notesSlides/notesSlide3.xml><?xml version="1.0" encoding="utf-8"?>
+<file path=ppt/notesSlides/notesSlide4.xml><?xml version="1.0" encoding="utf-8"?>
 <p:notes xmlns:a="http://schemas.openxmlformats.org/drawingml/2006/main" xmlns:r="http://schemas.openxmlformats.org/officeDocument/2006/relationships" xmlns:p="http://schemas.openxmlformats.org/presentationml/2006/main" showMasterPhAnim="0" showMasterSp="0">
   <p:cSld>
     <p:spTree>
       <p:nvGrpSpPr>
-        <p:cNvPr id="110" name="Shape 110"/>
+        <p:cNvPr id="146" name="Shape 146"/>
         <p:cNvGrpSpPr/>
         <p:nvPr/>
       </p:nvGrpSpPr>
@@ -945,7 +1063,7 @@
       </p:grpSpPr>
       <p:sp>
         <p:nvSpPr>
-          <p:cNvPr id="111" name="Google Shape;111;p3:notes"/>
+          <p:cNvPr id="147" name="Google Shape;147;p5:notes"/>
           <p:cNvSpPr txBox="1"/>
           <p:nvPr>
             <p:ph type="body" idx="1"/>
@@ -980,106 +1098,7 @@
       </p:sp>
       <p:sp>
         <p:nvSpPr>
-          <p:cNvPr id="112" name="Google Shape;112;p3:notes"/>
-          <p:cNvSpPr/>
-          <p:nvPr>
-            <p:ph type="sldImg" idx="2"/>
-          </p:nvPr>
-        </p:nvSpPr>
-        <p:spPr>
-          <a:xfrm>
-            <a:off x="1143225" y="685800"/>
-            <a:ext cx="4572225" cy="3429000"/>
-          </a:xfrm>
-          <a:custGeom>
-            <a:avLst/>
-            <a:gdLst/>
-            <a:ahLst/>
-            <a:cxnLst/>
-            <a:rect l="l" t="t" r="r" b="b"/>
-            <a:pathLst>
-              <a:path w="120000" h="120000" extrusionOk="0">
-                <a:moveTo>
-                  <a:pt x="0" y="0"/>
-                </a:moveTo>
-                <a:lnTo>
-                  <a:pt x="120000" y="0"/>
-                </a:lnTo>
-                <a:lnTo>
-                  <a:pt x="120000" y="120000"/>
-                </a:lnTo>
-                <a:lnTo>
-                  <a:pt x="0" y="120000"/>
-                </a:lnTo>
-                <a:close/>
-              </a:path>
-            </a:pathLst>
-          </a:custGeom>
-        </p:spPr>
-      </p:sp>
-    </p:spTree>
-  </p:cSld>
-  <p:clrMapOvr>
-    <a:masterClrMapping/>
-  </p:clrMapOvr>
-</p:notes>
-</file>
-
-<file path=ppt/notesSlides/notesSlide4.xml><?xml version="1.0" encoding="utf-8"?>
-<p:notes xmlns:a="http://schemas.openxmlformats.org/drawingml/2006/main" xmlns:r="http://schemas.openxmlformats.org/officeDocument/2006/relationships" xmlns:p="http://schemas.openxmlformats.org/presentationml/2006/main" showMasterPhAnim="0" showMasterSp="0">
-  <p:cSld>
-    <p:spTree>
-      <p:nvGrpSpPr>
-        <p:cNvPr id="127" name="Shape 127"/>
-        <p:cNvGrpSpPr/>
-        <p:nvPr/>
-      </p:nvGrpSpPr>
-      <p:grpSpPr>
-        <a:xfrm>
-          <a:off x="0" y="0"/>
-          <a:ext cx="0" cy="0"/>
-          <a:chOff x="0" y="0"/>
-          <a:chExt cx="0" cy="0"/>
-        </a:xfrm>
-      </p:grpSpPr>
-      <p:sp>
-        <p:nvSpPr>
-          <p:cNvPr id="128" name="Google Shape;128;p4:notes"/>
-          <p:cNvSpPr txBox="1"/>
-          <p:nvPr>
-            <p:ph type="body" idx="1"/>
-          </p:nvPr>
-        </p:nvSpPr>
-        <p:spPr>
-          <a:xfrm>
-            <a:off x="685800" y="4343400"/>
-            <a:ext cx="5486400" cy="4114800"/>
-          </a:xfrm>
-          <a:prstGeom prst="rect">
-            <a:avLst/>
-          </a:prstGeom>
-        </p:spPr>
-        <p:txBody>
-          <a:bodyPr spcFirstLastPara="1" wrap="square" lIns="91425" tIns="91425" rIns="91425" bIns="91425" anchor="t" anchorCtr="0">
-            <a:noAutofit/>
-          </a:bodyPr>
-          <a:lstStyle/>
-          <a:p>
-            <a:pPr marL="0" lvl="0" indent="0" algn="l" rtl="0">
-              <a:spcBef>
-                <a:spcPts val="0"/>
-              </a:spcBef>
-              <a:spcAft>
-                <a:spcPts val="0"/>
-              </a:spcAft>
-              <a:buNone/>
-            </a:pPr>
-          </a:p>
-        </p:txBody>
-      </p:sp>
-      <p:sp>
-        <p:nvSpPr>
-          <p:cNvPr id="129" name="Google Shape;129;p4:notes"/>
+          <p:cNvPr id="148" name="Google Shape;148;p5:notes"/>
           <p:cNvSpPr/>
           <p:nvPr>
             <p:ph type="sldImg" idx="2"/>
@@ -1129,7 +1148,7 @@
   <p:cSld>
     <p:spTree>
       <p:nvGrpSpPr>
-        <p:cNvPr id="165" name="Shape 165"/>
+        <p:cNvPr id="1" name="Shape 127"/>
         <p:cNvGrpSpPr/>
         <p:nvPr/>
       </p:nvGrpSpPr>
@@ -1143,8 +1162,10 @@
       </p:grpSpPr>
       <p:sp>
         <p:nvSpPr>
-          <p:cNvPr id="166" name="Google Shape;166;p6:notes"/>
-          <p:cNvSpPr txBox="1"/>
+          <p:cNvPr id="128" name="Google Shape;128;p4:notes"/>
+          <p:cNvSpPr txBox="1">
+            <a:spLocks noGrp="1"/>
+          </p:cNvSpPr>
           <p:nvPr>
             <p:ph type="body" idx="1"/>
           </p:nvPr>
@@ -1178,8 +1199,120 @@
       </p:sp>
       <p:sp>
         <p:nvSpPr>
+          <p:cNvPr id="129" name="Google Shape;129;p4:notes"/>
+          <p:cNvSpPr>
+            <a:spLocks noGrp="1" noRot="1" noChangeAspect="1"/>
+          </p:cNvSpPr>
+          <p:nvPr>
+            <p:ph type="sldImg" idx="2"/>
+          </p:nvPr>
+        </p:nvSpPr>
+        <p:spPr>
+          <a:xfrm>
+            <a:off x="381000" y="685800"/>
+            <a:ext cx="6096000" cy="3429000"/>
+          </a:xfrm>
+          <a:custGeom>
+            <a:avLst/>
+            <a:gdLst/>
+            <a:ahLst/>
+            <a:cxnLst/>
+            <a:rect l="l" t="t" r="r" b="b"/>
+            <a:pathLst>
+              <a:path w="120000" h="120000" extrusionOk="0">
+                <a:moveTo>
+                  <a:pt x="0" y="0"/>
+                </a:moveTo>
+                <a:lnTo>
+                  <a:pt x="120000" y="0"/>
+                </a:lnTo>
+                <a:lnTo>
+                  <a:pt x="120000" y="120000"/>
+                </a:lnTo>
+                <a:lnTo>
+                  <a:pt x="0" y="120000"/>
+                </a:lnTo>
+                <a:close/>
+              </a:path>
+            </a:pathLst>
+          </a:custGeom>
+        </p:spPr>
+        <p:txBody>
+          <a:bodyPr/>
+          <a:lstStyle/>
+          <a:p>
+            <a:endParaRPr lang="ru-RU"/>
+          </a:p>
+        </p:txBody>
+      </p:sp>
+    </p:spTree>
+  </p:cSld>
+  <p:clrMapOvr>
+    <a:masterClrMapping/>
+  </p:clrMapOvr>
+</p:notes>
+</file>
+
+<file path=ppt/notesSlides/notesSlide6.xml><?xml version="1.0" encoding="utf-8"?>
+<p:notes xmlns:a="http://schemas.openxmlformats.org/drawingml/2006/main" xmlns:r="http://schemas.openxmlformats.org/officeDocument/2006/relationships" xmlns:p="http://schemas.openxmlformats.org/presentationml/2006/main" showMasterPhAnim="0" showMasterSp="0">
+  <p:cSld>
+    <p:spTree>
+      <p:nvGrpSpPr>
+        <p:cNvPr id="1" name="Shape 165"/>
+        <p:cNvGrpSpPr/>
+        <p:nvPr/>
+      </p:nvGrpSpPr>
+      <p:grpSpPr>
+        <a:xfrm>
+          <a:off x="0" y="0"/>
+          <a:ext cx="0" cy="0"/>
+          <a:chOff x="0" y="0"/>
+          <a:chExt cx="0" cy="0"/>
+        </a:xfrm>
+      </p:grpSpPr>
+      <p:sp>
+        <p:nvSpPr>
+          <p:cNvPr id="166" name="Google Shape;166;p6:notes"/>
+          <p:cNvSpPr txBox="1">
+            <a:spLocks noGrp="1"/>
+          </p:cNvSpPr>
+          <p:nvPr>
+            <p:ph type="body" idx="1"/>
+          </p:nvPr>
+        </p:nvSpPr>
+        <p:spPr>
+          <a:xfrm>
+            <a:off x="685800" y="4343400"/>
+            <a:ext cx="5486400" cy="4114800"/>
+          </a:xfrm>
+          <a:prstGeom prst="rect">
+            <a:avLst/>
+          </a:prstGeom>
+        </p:spPr>
+        <p:txBody>
+          <a:bodyPr spcFirstLastPara="1" wrap="square" lIns="91425" tIns="91425" rIns="91425" bIns="91425" anchor="t" anchorCtr="0">
+            <a:noAutofit/>
+          </a:bodyPr>
+          <a:lstStyle/>
+          <a:p>
+            <a:pPr marL="0" lvl="0" indent="0" algn="l" rtl="0">
+              <a:spcBef>
+                <a:spcPts val="0"/>
+              </a:spcBef>
+              <a:spcAft>
+                <a:spcPts val="0"/>
+              </a:spcAft>
+              <a:buNone/>
+            </a:pPr>
+          </a:p>
+        </p:txBody>
+      </p:sp>
+      <p:sp>
+        <p:nvSpPr>
           <p:cNvPr id="167" name="Google Shape;167;p6:notes"/>
-          <p:cNvSpPr/>
+          <p:cNvSpPr>
+            <a:spLocks noGrp="1" noRot="1" noChangeAspect="1"/>
+          </p:cNvSpPr>
           <p:nvPr>
             <p:ph type="sldImg" idx="2"/>
           </p:nvPr>
@@ -1214,6 +1347,13 @@
             </a:pathLst>
           </a:custGeom>
         </p:spPr>
+        <p:txBody>
+          <a:bodyPr/>
+          <a:lstStyle/>
+          <a:p>
+            <a:endParaRPr lang="ru-RU"/>
+          </a:p>
+        </p:txBody>
       </p:sp>
     </p:spTree>
   </p:cSld>
@@ -1223,12 +1363,12 @@
 </p:notes>
 </file>
 
-<file path=ppt/notesSlides/notesSlide6.xml><?xml version="1.0" encoding="utf-8"?>
+<file path=ppt/notesSlides/notesSlide7.xml><?xml version="1.0" encoding="utf-8"?>
 <p:notes xmlns:a="http://schemas.openxmlformats.org/drawingml/2006/main" xmlns:r="http://schemas.openxmlformats.org/officeDocument/2006/relationships" xmlns:p="http://schemas.openxmlformats.org/presentationml/2006/main" showMasterPhAnim="0" showMasterSp="0">
   <p:cSld>
     <p:spTree>
       <p:nvGrpSpPr>
-        <p:cNvPr id="184" name="Shape 184"/>
+        <p:cNvPr id="1" name="Shape 184"/>
         <p:cNvGrpSpPr/>
         <p:nvPr/>
       </p:nvGrpSpPr>
@@ -1243,7 +1383,9 @@
       <p:sp>
         <p:nvSpPr>
           <p:cNvPr id="185" name="Google Shape;185;p7:notes"/>
-          <p:cNvSpPr txBox="1"/>
+          <p:cNvSpPr txBox="1">
+            <a:spLocks noGrp="1"/>
+          </p:cNvSpPr>
           <p:nvPr>
             <p:ph type="body" idx="1"/>
           </p:nvPr>
@@ -1278,7 +1420,9 @@
       <p:sp>
         <p:nvSpPr>
           <p:cNvPr id="186" name="Google Shape;186;p7:notes"/>
-          <p:cNvSpPr/>
+          <p:cNvSpPr>
+            <a:spLocks noGrp="1" noRot="1" noChangeAspect="1"/>
+          </p:cNvSpPr>
           <p:nvPr>
             <p:ph type="sldImg" idx="2"/>
           </p:nvPr>
@@ -1313,6 +1457,13 @@
             </a:pathLst>
           </a:custGeom>
         </p:spPr>
+        <p:txBody>
+          <a:bodyPr/>
+          <a:lstStyle/>
+          <a:p>
+            <a:endParaRPr lang="ru-RU"/>
+          </a:p>
+        </p:txBody>
       </p:sp>
     </p:spTree>
   </p:cSld>
@@ -1327,7 +1478,7 @@
   <p:cSld name="BLANK">
     <p:spTree>
       <p:nvGrpSpPr>
-        <p:cNvPr id="11" name="Shape 11"/>
+        <p:cNvPr id="1" name="Shape 11"/>
         <p:cNvGrpSpPr/>
         <p:nvPr/>
       </p:nvGrpSpPr>
@@ -1342,7 +1493,9 @@
       <p:sp>
         <p:nvSpPr>
           <p:cNvPr id="12" name="Google Shape;12;p2"/>
-          <p:cNvSpPr txBox="1"/>
+          <p:cNvSpPr txBox="1">
+            <a:spLocks noGrp="1"/>
+          </p:cNvSpPr>
           <p:nvPr>
             <p:ph type="dt" idx="10"/>
           </p:nvPr>
@@ -1471,7 +1624,9 @@
       <p:sp>
         <p:nvSpPr>
           <p:cNvPr id="13" name="Google Shape;13;p2"/>
-          <p:cNvSpPr txBox="1"/>
+          <p:cNvSpPr txBox="1">
+            <a:spLocks noGrp="1"/>
+          </p:cNvSpPr>
           <p:nvPr>
             <p:ph type="ftr" idx="11"/>
           </p:nvPr>
@@ -1600,7 +1755,9 @@
       <p:sp>
         <p:nvSpPr>
           <p:cNvPr id="14" name="Google Shape;14;p2"/>
-          <p:cNvSpPr txBox="1"/>
+          <p:cNvSpPr txBox="1">
+            <a:spLocks noGrp="1"/>
+          </p:cNvSpPr>
           <p:nvPr>
             <p:ph type="sldNum" idx="12"/>
           </p:nvPr>
@@ -1717,7 +1874,7 @@
   <p:cSld name="VERTICAL_TEXT">
     <p:spTree>
       <p:nvGrpSpPr>
-        <p:cNvPr id="68" name="Shape 68"/>
+        <p:cNvPr id="1" name="Shape 68"/>
         <p:cNvGrpSpPr/>
         <p:nvPr/>
       </p:nvGrpSpPr>
@@ -1732,7 +1889,9 @@
       <p:sp>
         <p:nvSpPr>
           <p:cNvPr id="69" name="Google Shape;69;p11"/>
-          <p:cNvSpPr txBox="1"/>
+          <p:cNvSpPr txBox="1">
+            <a:spLocks noGrp="1"/>
+          </p:cNvSpPr>
           <p:nvPr>
             <p:ph type="title"/>
           </p:nvPr>
@@ -1864,7 +2023,9 @@
       <p:sp>
         <p:nvSpPr>
           <p:cNvPr id="70" name="Google Shape;70;p11"/>
-          <p:cNvSpPr txBox="1"/>
+          <p:cNvSpPr txBox="1">
+            <a:spLocks noGrp="1"/>
+          </p:cNvSpPr>
           <p:nvPr>
             <p:ph type="body" idx="1"/>
           </p:nvPr>
@@ -2020,7 +2181,9 @@
       <p:sp>
         <p:nvSpPr>
           <p:cNvPr id="71" name="Google Shape;71;p11"/>
-          <p:cNvSpPr txBox="1"/>
+          <p:cNvSpPr txBox="1">
+            <a:spLocks noGrp="1"/>
+          </p:cNvSpPr>
           <p:nvPr>
             <p:ph type="dt" idx="10"/>
           </p:nvPr>
@@ -2149,7 +2312,9 @@
       <p:sp>
         <p:nvSpPr>
           <p:cNvPr id="72" name="Google Shape;72;p11"/>
-          <p:cNvSpPr txBox="1"/>
+          <p:cNvSpPr txBox="1">
+            <a:spLocks noGrp="1"/>
+          </p:cNvSpPr>
           <p:nvPr>
             <p:ph type="ftr" idx="11"/>
           </p:nvPr>
@@ -2278,7 +2443,9 @@
       <p:sp>
         <p:nvSpPr>
           <p:cNvPr id="73" name="Google Shape;73;p11"/>
-          <p:cNvSpPr txBox="1"/>
+          <p:cNvSpPr txBox="1">
+            <a:spLocks noGrp="1"/>
+          </p:cNvSpPr>
           <p:nvPr>
             <p:ph type="sldNum" idx="12"/>
           </p:nvPr>
@@ -2395,7 +2562,7 @@
   <p:cSld name="VERTICAL_TITLE_AND_VERTICAL_TEXT">
     <p:spTree>
       <p:nvGrpSpPr>
-        <p:cNvPr id="74" name="Shape 74"/>
+        <p:cNvPr id="1" name="Shape 74"/>
         <p:cNvGrpSpPr/>
         <p:nvPr/>
       </p:nvGrpSpPr>
@@ -2410,7 +2577,9 @@
       <p:sp>
         <p:nvSpPr>
           <p:cNvPr id="75" name="Google Shape;75;p12"/>
-          <p:cNvSpPr txBox="1"/>
+          <p:cNvSpPr txBox="1">
+            <a:spLocks noGrp="1"/>
+          </p:cNvSpPr>
           <p:nvPr>
             <p:ph type="title"/>
           </p:nvPr>
@@ -2542,7 +2711,9 @@
       <p:sp>
         <p:nvSpPr>
           <p:cNvPr id="76" name="Google Shape;76;p12"/>
-          <p:cNvSpPr txBox="1"/>
+          <p:cNvSpPr txBox="1">
+            <a:spLocks noGrp="1"/>
+          </p:cNvSpPr>
           <p:nvPr>
             <p:ph type="body" idx="1"/>
           </p:nvPr>
@@ -2698,7 +2869,9 @@
       <p:sp>
         <p:nvSpPr>
           <p:cNvPr id="77" name="Google Shape;77;p12"/>
-          <p:cNvSpPr txBox="1"/>
+          <p:cNvSpPr txBox="1">
+            <a:spLocks noGrp="1"/>
+          </p:cNvSpPr>
           <p:nvPr>
             <p:ph type="dt" idx="10"/>
           </p:nvPr>
@@ -2827,7 +3000,9 @@
       <p:sp>
         <p:nvSpPr>
           <p:cNvPr id="78" name="Google Shape;78;p12"/>
-          <p:cNvSpPr txBox="1"/>
+          <p:cNvSpPr txBox="1">
+            <a:spLocks noGrp="1"/>
+          </p:cNvSpPr>
           <p:nvPr>
             <p:ph type="ftr" idx="11"/>
           </p:nvPr>
@@ -2956,7 +3131,9 @@
       <p:sp>
         <p:nvSpPr>
           <p:cNvPr id="79" name="Google Shape;79;p12"/>
-          <p:cNvSpPr txBox="1"/>
+          <p:cNvSpPr txBox="1">
+            <a:spLocks noGrp="1"/>
+          </p:cNvSpPr>
           <p:nvPr>
             <p:ph type="sldNum" idx="12"/>
           </p:nvPr>
@@ -3073,7 +3250,7 @@
   <p:cSld name="TITLE">
     <p:spTree>
       <p:nvGrpSpPr>
-        <p:cNvPr id="15" name="Shape 15"/>
+        <p:cNvPr id="1" name="Shape 15"/>
         <p:cNvGrpSpPr/>
         <p:nvPr/>
       </p:nvGrpSpPr>
@@ -3088,7 +3265,9 @@
       <p:sp>
         <p:nvSpPr>
           <p:cNvPr id="16" name="Google Shape;16;p3"/>
-          <p:cNvSpPr txBox="1"/>
+          <p:cNvSpPr txBox="1">
+            <a:spLocks noGrp="1"/>
+          </p:cNvSpPr>
           <p:nvPr>
             <p:ph type="ctrTitle"/>
           </p:nvPr>
@@ -3220,7 +3399,9 @@
       <p:sp>
         <p:nvSpPr>
           <p:cNvPr id="17" name="Google Shape;17;p3"/>
-          <p:cNvSpPr txBox="1"/>
+          <p:cNvSpPr txBox="1">
+            <a:spLocks noGrp="1"/>
+          </p:cNvSpPr>
           <p:nvPr>
             <p:ph type="subTitle" idx="1"/>
           </p:nvPr>
@@ -3412,7 +3593,9 @@
       <p:sp>
         <p:nvSpPr>
           <p:cNvPr id="18" name="Google Shape;18;p3"/>
-          <p:cNvSpPr txBox="1"/>
+          <p:cNvSpPr txBox="1">
+            <a:spLocks noGrp="1"/>
+          </p:cNvSpPr>
           <p:nvPr>
             <p:ph type="dt" idx="10"/>
           </p:nvPr>
@@ -3541,7 +3724,9 @@
       <p:sp>
         <p:nvSpPr>
           <p:cNvPr id="19" name="Google Shape;19;p3"/>
-          <p:cNvSpPr txBox="1"/>
+          <p:cNvSpPr txBox="1">
+            <a:spLocks noGrp="1"/>
+          </p:cNvSpPr>
           <p:nvPr>
             <p:ph type="ftr" idx="11"/>
           </p:nvPr>
@@ -3670,7 +3855,9 @@
       <p:sp>
         <p:nvSpPr>
           <p:cNvPr id="20" name="Google Shape;20;p3"/>
-          <p:cNvSpPr txBox="1"/>
+          <p:cNvSpPr txBox="1">
+            <a:spLocks noGrp="1"/>
+          </p:cNvSpPr>
           <p:nvPr>
             <p:ph type="sldNum" idx="12"/>
           </p:nvPr>
@@ -3787,7 +3974,7 @@
   <p:cSld name="OBJECT">
     <p:spTree>
       <p:nvGrpSpPr>
-        <p:cNvPr id="21" name="Shape 21"/>
+        <p:cNvPr id="1" name="Shape 21"/>
         <p:cNvGrpSpPr/>
         <p:nvPr/>
       </p:nvGrpSpPr>
@@ -3802,7 +3989,9 @@
       <p:sp>
         <p:nvSpPr>
           <p:cNvPr id="22" name="Google Shape;22;p4"/>
-          <p:cNvSpPr txBox="1"/>
+          <p:cNvSpPr txBox="1">
+            <a:spLocks noGrp="1"/>
+          </p:cNvSpPr>
           <p:nvPr>
             <p:ph type="title"/>
           </p:nvPr>
@@ -3934,7 +4123,9 @@
       <p:sp>
         <p:nvSpPr>
           <p:cNvPr id="23" name="Google Shape;23;p4"/>
-          <p:cNvSpPr txBox="1"/>
+          <p:cNvSpPr txBox="1">
+            <a:spLocks noGrp="1"/>
+          </p:cNvSpPr>
           <p:nvPr>
             <p:ph type="body" idx="1"/>
           </p:nvPr>
@@ -4090,7 +4281,9 @@
       <p:sp>
         <p:nvSpPr>
           <p:cNvPr id="24" name="Google Shape;24;p4"/>
-          <p:cNvSpPr txBox="1"/>
+          <p:cNvSpPr txBox="1">
+            <a:spLocks noGrp="1"/>
+          </p:cNvSpPr>
           <p:nvPr>
             <p:ph type="dt" idx="10"/>
           </p:nvPr>
@@ -4219,7 +4412,9 @@
       <p:sp>
         <p:nvSpPr>
           <p:cNvPr id="25" name="Google Shape;25;p4"/>
-          <p:cNvSpPr txBox="1"/>
+          <p:cNvSpPr txBox="1">
+            <a:spLocks noGrp="1"/>
+          </p:cNvSpPr>
           <p:nvPr>
             <p:ph type="ftr" idx="11"/>
           </p:nvPr>
@@ -4348,7 +4543,9 @@
       <p:sp>
         <p:nvSpPr>
           <p:cNvPr id="26" name="Google Shape;26;p4"/>
-          <p:cNvSpPr txBox="1"/>
+          <p:cNvSpPr txBox="1">
+            <a:spLocks noGrp="1"/>
+          </p:cNvSpPr>
           <p:nvPr>
             <p:ph type="sldNum" idx="12"/>
           </p:nvPr>
@@ -4465,7 +4662,7 @@
   <p:cSld name="SECTION_HEADER">
     <p:spTree>
       <p:nvGrpSpPr>
-        <p:cNvPr id="27" name="Shape 27"/>
+        <p:cNvPr id="1" name="Shape 27"/>
         <p:cNvGrpSpPr/>
         <p:nvPr/>
       </p:nvGrpSpPr>
@@ -4480,7 +4677,9 @@
       <p:sp>
         <p:nvSpPr>
           <p:cNvPr id="28" name="Google Shape;28;p5"/>
-          <p:cNvSpPr txBox="1"/>
+          <p:cNvSpPr txBox="1">
+            <a:spLocks noGrp="1"/>
+          </p:cNvSpPr>
           <p:nvPr>
             <p:ph type="title"/>
           </p:nvPr>
@@ -4613,7 +4812,9 @@
       <p:sp>
         <p:nvSpPr>
           <p:cNvPr id="29" name="Google Shape;29;p5"/>
-          <p:cNvSpPr txBox="1"/>
+          <p:cNvSpPr txBox="1">
+            <a:spLocks noGrp="1"/>
+          </p:cNvSpPr>
           <p:nvPr>
             <p:ph type="body" idx="1"/>
           </p:nvPr>
@@ -4805,7 +5006,9 @@
       <p:sp>
         <p:nvSpPr>
           <p:cNvPr id="30" name="Google Shape;30;p5"/>
-          <p:cNvSpPr txBox="1"/>
+          <p:cNvSpPr txBox="1">
+            <a:spLocks noGrp="1"/>
+          </p:cNvSpPr>
           <p:nvPr>
             <p:ph type="dt" idx="10"/>
           </p:nvPr>
@@ -4934,7 +5137,9 @@
       <p:sp>
         <p:nvSpPr>
           <p:cNvPr id="31" name="Google Shape;31;p5"/>
-          <p:cNvSpPr txBox="1"/>
+          <p:cNvSpPr txBox="1">
+            <a:spLocks noGrp="1"/>
+          </p:cNvSpPr>
           <p:nvPr>
             <p:ph type="ftr" idx="11"/>
           </p:nvPr>
@@ -5063,7 +5268,9 @@
       <p:sp>
         <p:nvSpPr>
           <p:cNvPr id="32" name="Google Shape;32;p5"/>
-          <p:cNvSpPr txBox="1"/>
+          <p:cNvSpPr txBox="1">
+            <a:spLocks noGrp="1"/>
+          </p:cNvSpPr>
           <p:nvPr>
             <p:ph type="sldNum" idx="12"/>
           </p:nvPr>
@@ -5180,7 +5387,7 @@
   <p:cSld name="TWO_OBJECTS">
     <p:spTree>
       <p:nvGrpSpPr>
-        <p:cNvPr id="33" name="Shape 33"/>
+        <p:cNvPr id="1" name="Shape 33"/>
         <p:cNvGrpSpPr/>
         <p:nvPr/>
       </p:nvGrpSpPr>
@@ -5195,7 +5402,9 @@
       <p:sp>
         <p:nvSpPr>
           <p:cNvPr id="34" name="Google Shape;34;p6"/>
-          <p:cNvSpPr txBox="1"/>
+          <p:cNvSpPr txBox="1">
+            <a:spLocks noGrp="1"/>
+          </p:cNvSpPr>
           <p:nvPr>
             <p:ph type="title"/>
           </p:nvPr>
@@ -5327,7 +5536,9 @@
       <p:sp>
         <p:nvSpPr>
           <p:cNvPr id="35" name="Google Shape;35;p6"/>
-          <p:cNvSpPr txBox="1"/>
+          <p:cNvSpPr txBox="1">
+            <a:spLocks noGrp="1"/>
+          </p:cNvSpPr>
           <p:nvPr>
             <p:ph type="body" idx="1"/>
           </p:nvPr>
@@ -5483,7 +5694,9 @@
       <p:sp>
         <p:nvSpPr>
           <p:cNvPr id="36" name="Google Shape;36;p6"/>
-          <p:cNvSpPr txBox="1"/>
+          <p:cNvSpPr txBox="1">
+            <a:spLocks noGrp="1"/>
+          </p:cNvSpPr>
           <p:nvPr>
             <p:ph type="body" idx="2"/>
           </p:nvPr>
@@ -5639,7 +5852,9 @@
       <p:sp>
         <p:nvSpPr>
           <p:cNvPr id="37" name="Google Shape;37;p6"/>
-          <p:cNvSpPr txBox="1"/>
+          <p:cNvSpPr txBox="1">
+            <a:spLocks noGrp="1"/>
+          </p:cNvSpPr>
           <p:nvPr>
             <p:ph type="dt" idx="10"/>
           </p:nvPr>
@@ -5768,7 +5983,9 @@
       <p:sp>
         <p:nvSpPr>
           <p:cNvPr id="38" name="Google Shape;38;p6"/>
-          <p:cNvSpPr txBox="1"/>
+          <p:cNvSpPr txBox="1">
+            <a:spLocks noGrp="1"/>
+          </p:cNvSpPr>
           <p:nvPr>
             <p:ph type="ftr" idx="11"/>
           </p:nvPr>
@@ -5897,7 +6114,9 @@
       <p:sp>
         <p:nvSpPr>
           <p:cNvPr id="39" name="Google Shape;39;p6"/>
-          <p:cNvSpPr txBox="1"/>
+          <p:cNvSpPr txBox="1">
+            <a:spLocks noGrp="1"/>
+          </p:cNvSpPr>
           <p:nvPr>
             <p:ph type="sldNum" idx="12"/>
           </p:nvPr>
@@ -6014,7 +6233,7 @@
   <p:cSld name="TWO_OBJECTS_WITH_TEXT">
     <p:spTree>
       <p:nvGrpSpPr>
-        <p:cNvPr id="40" name="Shape 40"/>
+        <p:cNvPr id="1" name="Shape 40"/>
         <p:cNvGrpSpPr/>
         <p:nvPr/>
       </p:nvGrpSpPr>
@@ -6029,7 +6248,9 @@
       <p:sp>
         <p:nvSpPr>
           <p:cNvPr id="41" name="Google Shape;41;p7"/>
-          <p:cNvSpPr txBox="1"/>
+          <p:cNvSpPr txBox="1">
+            <a:spLocks noGrp="1"/>
+          </p:cNvSpPr>
           <p:nvPr>
             <p:ph type="title"/>
           </p:nvPr>
@@ -6162,7 +6383,9 @@
       <p:sp>
         <p:nvSpPr>
           <p:cNvPr id="42" name="Google Shape;42;p7"/>
-          <p:cNvSpPr txBox="1"/>
+          <p:cNvSpPr txBox="1">
+            <a:spLocks noGrp="1"/>
+          </p:cNvSpPr>
           <p:nvPr>
             <p:ph type="body" idx="1"/>
           </p:nvPr>
@@ -6318,7 +6541,9 @@
       <p:sp>
         <p:nvSpPr>
           <p:cNvPr id="43" name="Google Shape;43;p7"/>
-          <p:cNvSpPr txBox="1"/>
+          <p:cNvSpPr txBox="1">
+            <a:spLocks noGrp="1"/>
+          </p:cNvSpPr>
           <p:nvPr>
             <p:ph type="body" idx="2"/>
           </p:nvPr>
@@ -6474,7 +6699,9 @@
       <p:sp>
         <p:nvSpPr>
           <p:cNvPr id="44" name="Google Shape;44;p7"/>
-          <p:cNvSpPr txBox="1"/>
+          <p:cNvSpPr txBox="1">
+            <a:spLocks noGrp="1"/>
+          </p:cNvSpPr>
           <p:nvPr>
             <p:ph type="body" idx="3"/>
           </p:nvPr>
@@ -6630,7 +6857,9 @@
       <p:sp>
         <p:nvSpPr>
           <p:cNvPr id="45" name="Google Shape;45;p7"/>
-          <p:cNvSpPr txBox="1"/>
+          <p:cNvSpPr txBox="1">
+            <a:spLocks noGrp="1"/>
+          </p:cNvSpPr>
           <p:nvPr>
             <p:ph type="body" idx="4"/>
           </p:nvPr>
@@ -6786,7 +7015,9 @@
       <p:sp>
         <p:nvSpPr>
           <p:cNvPr id="46" name="Google Shape;46;p7"/>
-          <p:cNvSpPr txBox="1"/>
+          <p:cNvSpPr txBox="1">
+            <a:spLocks noGrp="1"/>
+          </p:cNvSpPr>
           <p:nvPr>
             <p:ph type="dt" idx="10"/>
           </p:nvPr>
@@ -6915,7 +7146,9 @@
       <p:sp>
         <p:nvSpPr>
           <p:cNvPr id="47" name="Google Shape;47;p7"/>
-          <p:cNvSpPr txBox="1"/>
+          <p:cNvSpPr txBox="1">
+            <a:spLocks noGrp="1"/>
+          </p:cNvSpPr>
           <p:nvPr>
             <p:ph type="ftr" idx="11"/>
           </p:nvPr>
@@ -7044,7 +7277,9 @@
       <p:sp>
         <p:nvSpPr>
           <p:cNvPr id="48" name="Google Shape;48;p7"/>
-          <p:cNvSpPr txBox="1"/>
+          <p:cNvSpPr txBox="1">
+            <a:spLocks noGrp="1"/>
+          </p:cNvSpPr>
           <p:nvPr>
             <p:ph type="sldNum" idx="12"/>
           </p:nvPr>
@@ -7161,7 +7396,7 @@
   <p:cSld name="TITLE_ONLY">
     <p:spTree>
       <p:nvGrpSpPr>
-        <p:cNvPr id="49" name="Shape 49"/>
+        <p:cNvPr id="1" name="Shape 49"/>
         <p:cNvGrpSpPr/>
         <p:nvPr/>
       </p:nvGrpSpPr>
@@ -7176,7 +7411,9 @@
       <p:sp>
         <p:nvSpPr>
           <p:cNvPr id="50" name="Google Shape;50;p8"/>
-          <p:cNvSpPr txBox="1"/>
+          <p:cNvSpPr txBox="1">
+            <a:spLocks noGrp="1"/>
+          </p:cNvSpPr>
           <p:nvPr>
             <p:ph type="title"/>
           </p:nvPr>
@@ -7308,7 +7545,9 @@
       <p:sp>
         <p:nvSpPr>
           <p:cNvPr id="51" name="Google Shape;51;p8"/>
-          <p:cNvSpPr txBox="1"/>
+          <p:cNvSpPr txBox="1">
+            <a:spLocks noGrp="1"/>
+          </p:cNvSpPr>
           <p:nvPr>
             <p:ph type="dt" idx="10"/>
           </p:nvPr>
@@ -7437,7 +7676,9 @@
       <p:sp>
         <p:nvSpPr>
           <p:cNvPr id="52" name="Google Shape;52;p8"/>
-          <p:cNvSpPr txBox="1"/>
+          <p:cNvSpPr txBox="1">
+            <a:spLocks noGrp="1"/>
+          </p:cNvSpPr>
           <p:nvPr>
             <p:ph type="ftr" idx="11"/>
           </p:nvPr>
@@ -7566,7 +7807,9 @@
       <p:sp>
         <p:nvSpPr>
           <p:cNvPr id="53" name="Google Shape;53;p8"/>
-          <p:cNvSpPr txBox="1"/>
+          <p:cNvSpPr txBox="1">
+            <a:spLocks noGrp="1"/>
+          </p:cNvSpPr>
           <p:nvPr>
             <p:ph type="sldNum" idx="12"/>
           </p:nvPr>
@@ -7683,7 +7926,7 @@
   <p:cSld name="OBJECT_WITH_CAPTION_TEXT">
     <p:spTree>
       <p:nvGrpSpPr>
-        <p:cNvPr id="54" name="Shape 54"/>
+        <p:cNvPr id="1" name="Shape 54"/>
         <p:cNvGrpSpPr/>
         <p:nvPr/>
       </p:nvGrpSpPr>
@@ -7698,7 +7941,9 @@
       <p:sp>
         <p:nvSpPr>
           <p:cNvPr id="55" name="Google Shape;55;p9"/>
-          <p:cNvSpPr txBox="1"/>
+          <p:cNvSpPr txBox="1">
+            <a:spLocks noGrp="1"/>
+          </p:cNvSpPr>
           <p:nvPr>
             <p:ph type="title"/>
           </p:nvPr>
@@ -7831,7 +8076,9 @@
       <p:sp>
         <p:nvSpPr>
           <p:cNvPr id="56" name="Google Shape;56;p9"/>
-          <p:cNvSpPr txBox="1"/>
+          <p:cNvSpPr txBox="1">
+            <a:spLocks noGrp="1"/>
+          </p:cNvSpPr>
           <p:nvPr>
             <p:ph type="body" idx="1"/>
           </p:nvPr>
@@ -7987,7 +8234,9 @@
       <p:sp>
         <p:nvSpPr>
           <p:cNvPr id="57" name="Google Shape;57;p9"/>
-          <p:cNvSpPr txBox="1"/>
+          <p:cNvSpPr txBox="1">
+            <a:spLocks noGrp="1"/>
+          </p:cNvSpPr>
           <p:nvPr>
             <p:ph type="body" idx="2"/>
           </p:nvPr>
@@ -8143,7 +8392,9 @@
       <p:sp>
         <p:nvSpPr>
           <p:cNvPr id="58" name="Google Shape;58;p9"/>
-          <p:cNvSpPr txBox="1"/>
+          <p:cNvSpPr txBox="1">
+            <a:spLocks noGrp="1"/>
+          </p:cNvSpPr>
           <p:nvPr>
             <p:ph type="dt" idx="10"/>
           </p:nvPr>
@@ -8272,7 +8523,9 @@
       <p:sp>
         <p:nvSpPr>
           <p:cNvPr id="59" name="Google Shape;59;p9"/>
-          <p:cNvSpPr txBox="1"/>
+          <p:cNvSpPr txBox="1">
+            <a:spLocks noGrp="1"/>
+          </p:cNvSpPr>
           <p:nvPr>
             <p:ph type="ftr" idx="11"/>
           </p:nvPr>
@@ -8401,7 +8654,9 @@
       <p:sp>
         <p:nvSpPr>
           <p:cNvPr id="60" name="Google Shape;60;p9"/>
-          <p:cNvSpPr txBox="1"/>
+          <p:cNvSpPr txBox="1">
+            <a:spLocks noGrp="1"/>
+          </p:cNvSpPr>
           <p:nvPr>
             <p:ph type="sldNum" idx="12"/>
           </p:nvPr>
@@ -8518,7 +8773,7 @@
   <p:cSld name="PICTURE_WITH_CAPTION_TEXT">
     <p:spTree>
       <p:nvGrpSpPr>
-        <p:cNvPr id="61" name="Shape 61"/>
+        <p:cNvPr id="1" name="Shape 61"/>
         <p:cNvGrpSpPr/>
         <p:nvPr/>
       </p:nvGrpSpPr>
@@ -8533,7 +8788,9 @@
       <p:sp>
         <p:nvSpPr>
           <p:cNvPr id="62" name="Google Shape;62;p10"/>
-          <p:cNvSpPr txBox="1"/>
+          <p:cNvSpPr txBox="1">
+            <a:spLocks noGrp="1"/>
+          </p:cNvSpPr>
           <p:nvPr>
             <p:ph type="title"/>
           </p:nvPr>
@@ -8666,7 +8923,9 @@
       <p:sp>
         <p:nvSpPr>
           <p:cNvPr id="63" name="Google Shape;63;p10"/>
-          <p:cNvSpPr/>
+          <p:cNvSpPr>
+            <a:spLocks noGrp="1"/>
+          </p:cNvSpPr>
           <p:nvPr>
             <p:ph type="pic" idx="2"/>
           </p:nvPr>
@@ -8684,11 +8943,20 @@
             <a:noFill/>
           </a:ln>
         </p:spPr>
+        <p:txBody>
+          <a:bodyPr/>
+          <a:lstStyle/>
+          <a:p>
+            <a:endParaRPr lang="ru-RU"/>
+          </a:p>
+        </p:txBody>
       </p:sp>
       <p:sp>
         <p:nvSpPr>
           <p:cNvPr id="64" name="Google Shape;64;p10"/>
-          <p:cNvSpPr txBox="1"/>
+          <p:cNvSpPr txBox="1">
+            <a:spLocks noGrp="1"/>
+          </p:cNvSpPr>
           <p:nvPr>
             <p:ph type="body" idx="1"/>
           </p:nvPr>
@@ -8844,7 +9112,9 @@
       <p:sp>
         <p:nvSpPr>
           <p:cNvPr id="65" name="Google Shape;65;p10"/>
-          <p:cNvSpPr txBox="1"/>
+          <p:cNvSpPr txBox="1">
+            <a:spLocks noGrp="1"/>
+          </p:cNvSpPr>
           <p:nvPr>
             <p:ph type="dt" idx="10"/>
           </p:nvPr>
@@ -8973,7 +9243,9 @@
       <p:sp>
         <p:nvSpPr>
           <p:cNvPr id="66" name="Google Shape;66;p10"/>
-          <p:cNvSpPr txBox="1"/>
+          <p:cNvSpPr txBox="1">
+            <a:spLocks noGrp="1"/>
+          </p:cNvSpPr>
           <p:nvPr>
             <p:ph type="ftr" idx="11"/>
           </p:nvPr>
@@ -9102,7 +9374,9 @@
       <p:sp>
         <p:nvSpPr>
           <p:cNvPr id="67" name="Google Shape;67;p10"/>
-          <p:cNvSpPr txBox="1"/>
+          <p:cNvSpPr txBox="1">
+            <a:spLocks noGrp="1"/>
+          </p:cNvSpPr>
           <p:nvPr>
             <p:ph type="sldNum" idx="12"/>
           </p:nvPr>
@@ -9227,7 +9501,7 @@
     </p:bg>
     <p:spTree>
       <p:nvGrpSpPr>
-        <p:cNvPr id="5" name="Shape 5"/>
+        <p:cNvPr id="1" name="Shape 5"/>
         <p:cNvGrpSpPr/>
         <p:nvPr/>
       </p:nvGrpSpPr>
@@ -9242,7 +9516,9 @@
       <p:sp>
         <p:nvSpPr>
           <p:cNvPr id="6" name="Google Shape;6;p1"/>
-          <p:cNvSpPr txBox="1"/>
+          <p:cNvSpPr txBox="1">
+            <a:spLocks noGrp="1"/>
+          </p:cNvSpPr>
           <p:nvPr>
             <p:ph type="title"/>
           </p:nvPr>
@@ -9383,7 +9659,9 @@
       <p:sp>
         <p:nvSpPr>
           <p:cNvPr id="7" name="Google Shape;7;p1"/>
-          <p:cNvSpPr txBox="1"/>
+          <p:cNvSpPr txBox="1">
+            <a:spLocks noGrp="1"/>
+          </p:cNvSpPr>
           <p:nvPr>
             <p:ph type="body" idx="1"/>
           </p:nvPr>
@@ -9620,7 +9898,9 @@
       <p:sp>
         <p:nvSpPr>
           <p:cNvPr id="8" name="Google Shape;8;p1"/>
-          <p:cNvSpPr txBox="1"/>
+          <p:cNvSpPr txBox="1">
+            <a:spLocks noGrp="1"/>
+          </p:cNvSpPr>
           <p:nvPr>
             <p:ph type="dt" idx="10"/>
           </p:nvPr>
@@ -9821,7 +10101,9 @@
       <p:sp>
         <p:nvSpPr>
           <p:cNvPr id="9" name="Google Shape;9;p1"/>
-          <p:cNvSpPr txBox="1"/>
+          <p:cNvSpPr txBox="1">
+            <a:spLocks noGrp="1"/>
+          </p:cNvSpPr>
           <p:nvPr>
             <p:ph type="ftr" idx="11"/>
           </p:nvPr>
@@ -10022,7 +10304,9 @@
       <p:sp>
         <p:nvSpPr>
           <p:cNvPr id="10" name="Google Shape;10;p1"/>
-          <p:cNvSpPr txBox="1"/>
+          <p:cNvSpPr txBox="1">
+            <a:spLocks noGrp="1"/>
+          </p:cNvSpPr>
           <p:nvPr>
             <p:ph type="sldNum" idx="12"/>
           </p:nvPr>
@@ -10912,7 +11196,7 @@
   <p:cSld>
     <p:spTree>
       <p:nvGrpSpPr>
-        <p:cNvPr id="83" name="Shape 83"/>
+        <p:cNvPr id="1" name="Shape 83"/>
         <p:cNvGrpSpPr/>
         <p:nvPr/>
       </p:nvGrpSpPr>
@@ -10939,7 +11223,7 @@
         </p:blipFill>
         <p:spPr>
           <a:xfrm>
-            <a:off x="0" y="0"/>
+            <a:off x="-2" y="0"/>
             <a:ext cx="12192000" cy="6858000"/>
           </a:xfrm>
           <a:prstGeom prst="rect">
@@ -10959,8 +11243,8 @@
         </p:nvSpPr>
         <p:spPr>
           <a:xfrm>
-            <a:off x="2290762" y="952500"/>
-            <a:ext cx="7610475" cy="207645"/>
+            <a:off x="1176338" y="454469"/>
+            <a:ext cx="9839324" cy="215444"/>
           </a:xfrm>
           <a:prstGeom prst="rect">
             <a:avLst/>
@@ -10986,9 +11270,9 @@
               <a:buNone/>
             </a:pPr>
             <a:r>
-              <a:rPr lang="en-US" sz="1350" b="1" i="0" u="none" strike="noStrike" cap="none">
-                <a:solidFill>
-                  <a:srgbClr val="64748B"/>
+              <a:rPr lang="en-US" b="1" i="0" u="none" strike="noStrike" cap="none" dirty="0">
+                <a:solidFill>
+                  <a:schemeClr val="tx1"/>
                 </a:solidFill>
                 <a:latin typeface="Times New Roman" panose="02020603050405020304" charset="0"/>
                 <a:ea typeface="Open Sans"/>
@@ -10997,9 +11281,9 @@
               </a:rPr>
               <a:t>ГАПОУ СО «БАЛАШОВСКИЙ ТЕХНИКУМ МЕХАНИЗАЦИИ СЕЛЬСКОГО ХОЗЯЙСТВА»</a:t>
             </a:r>
-            <a:endParaRPr lang="en-US" sz="1350" b="1" i="0" u="none" strike="noStrike" cap="none">
+            <a:endParaRPr lang="en-US" b="1" i="0" u="none" strike="noStrike" cap="none" dirty="0">
               <a:solidFill>
-                <a:srgbClr val="64748B"/>
+                <a:schemeClr val="tx1"/>
               </a:solidFill>
               <a:latin typeface="Times New Roman" panose="02020603050405020304" charset="0"/>
               <a:ea typeface="Open Sans"/>
@@ -11017,8 +11301,8 @@
         </p:nvSpPr>
         <p:spPr>
           <a:xfrm>
-            <a:off x="1333500" y="1581150"/>
-            <a:ext cx="9525000" cy="304800"/>
+            <a:off x="1333498" y="890326"/>
+            <a:ext cx="9525000" cy="886397"/>
           </a:xfrm>
           <a:prstGeom prst="rect">
             <a:avLst/>
@@ -11047,20 +11331,79 @@
               <a:buNone/>
             </a:pPr>
             <a:r>
-              <a:rPr lang="en-US" sz="1500" b="0" i="0" u="none" strike="noStrike" cap="none">
-                <a:solidFill>
-                  <a:srgbClr val="334155"/>
+              <a:rPr lang="en-US" sz="1800" b="1" i="0" u="none" strike="noStrike" cap="none" dirty="0" err="1">
+                <a:solidFill>
+                  <a:schemeClr val="tx1"/>
                 </a:solidFill>
                 <a:latin typeface="Times New Roman" panose="02020603050405020304" charset="0"/>
                 <a:ea typeface="Open Sans SemiBold"/>
                 <a:cs typeface="Times New Roman" panose="02020603050405020304" charset="0"/>
                 <a:sym typeface="Open Sans SemiBold"/>
               </a:rPr>
-              <a:t>Дипломная работа</a:t>
+              <a:t>Дипломн</a:t>
             </a:r>
-            <a:endParaRPr lang="en-US" sz="1500" b="0" i="0" u="none" strike="noStrike" cap="none">
+            <a:r>
+              <a:rPr lang="ru-RU" sz="1800" b="1" dirty="0" err="1">
+                <a:solidFill>
+                  <a:schemeClr val="tx1"/>
+                </a:solidFill>
+                <a:latin typeface="Times New Roman" panose="02020603050405020304" charset="0"/>
+                <a:ea typeface="Open Sans SemiBold"/>
+                <a:cs typeface="Times New Roman" panose="02020603050405020304" charset="0"/>
+                <a:sym typeface="Open Sans SemiBold"/>
+              </a:rPr>
+              <a:t>ый</a:t>
+            </a:r>
+            <a:r>
+              <a:rPr lang="ru-RU" sz="1800" b="1" dirty="0">
+                <a:solidFill>
+                  <a:schemeClr val="tx1"/>
+                </a:solidFill>
+                <a:latin typeface="Times New Roman" panose="02020603050405020304" charset="0"/>
+                <a:ea typeface="Open Sans SemiBold"/>
+                <a:cs typeface="Times New Roman" panose="02020603050405020304" charset="0"/>
+                <a:sym typeface="Open Sans SemiBold"/>
+              </a:rPr>
+              <a:t> проект</a:t>
+            </a:r>
+            <a:endParaRPr lang="ru-RU" sz="1800" b="1" dirty="0">
               <a:solidFill>
-                <a:srgbClr val="334155"/>
+                <a:schemeClr val="tx1"/>
+              </a:solidFill>
+              <a:latin typeface="Times New Roman" panose="02020603050405020304" charset="0"/>
+              <a:ea typeface="Open Sans SemiBold"/>
+              <a:cs typeface="Times New Roman" panose="02020603050405020304" charset="0"/>
+              <a:sym typeface="Open Sans SemiBold"/>
+            </a:endParaRPr>
+          </a:p>
+          <a:p>
+            <a:pPr marL="0" marR="0" lvl="0" indent="0" algn="ctr" rtl="0">
+              <a:lnSpc>
+                <a:spcPct val="160000"/>
+              </a:lnSpc>
+              <a:spcBef>
+                <a:spcPts val="0"/>
+              </a:spcBef>
+              <a:spcAft>
+                <a:spcPts val="0"/>
+              </a:spcAft>
+              <a:buNone/>
+            </a:pPr>
+            <a:r>
+              <a:rPr lang="ru-RU" sz="1800" b="1" i="0" u="none" strike="noStrike" cap="none" dirty="0">
+                <a:solidFill>
+                  <a:schemeClr val="tx1"/>
+                </a:solidFill>
+                <a:latin typeface="Times New Roman" panose="02020603050405020304" charset="0"/>
+                <a:ea typeface="Open Sans SemiBold"/>
+                <a:cs typeface="Times New Roman" panose="02020603050405020304" charset="0"/>
+                <a:sym typeface="Open Sans SemiBold"/>
+              </a:rPr>
+              <a:t>на тему:</a:t>
+            </a:r>
+            <a:endParaRPr lang="en-US" sz="1800" b="1" i="0" u="none" strike="noStrike" cap="none" dirty="0">
+              <a:solidFill>
+                <a:schemeClr val="tx1"/>
               </a:solidFill>
               <a:latin typeface="Times New Roman" panose="02020603050405020304" charset="0"/>
               <a:ea typeface="Open Sans SemiBold"/>
@@ -11078,8 +11421,8 @@
         </p:nvSpPr>
         <p:spPr>
           <a:xfrm>
-            <a:off x="1095375" y="1981200"/>
-            <a:ext cx="10001250" cy="1657350"/>
+            <a:off x="1095374" y="1875474"/>
+            <a:ext cx="10001250" cy="2215991"/>
           </a:xfrm>
           <a:prstGeom prst="rect">
             <a:avLst/>
@@ -11105,7 +11448,7 @@
               <a:buNone/>
             </a:pPr>
             <a:r>
-              <a:rPr lang="en-US" sz="3600" b="1" i="0" u="none" strike="noStrike" cap="none">
+              <a:rPr lang="en-US" sz="3600" b="1" i="0" u="none" strike="noStrike" cap="none" dirty="0" err="1">
                 <a:solidFill>
                   <a:srgbClr val="0B3D91"/>
                 </a:solidFill>
@@ -11114,9 +11457,125 @@
                 <a:cs typeface="Times New Roman" panose="02020603050405020304" charset="0"/>
                 <a:sym typeface="Montserrat"/>
               </a:rPr>
-              <a:t>Разработка информационной системы для автоматизации учета гемокомпонентов Службы крови</a:t>
+              <a:t>Разработка</a:t>
             </a:r>
-            <a:endParaRPr lang="en-US" sz="3600" b="1" i="0" u="none" strike="noStrike" cap="none">
+            <a:r>
+              <a:rPr lang="en-US" sz="3600" b="1" i="0" u="none" strike="noStrike" cap="none" dirty="0">
+                <a:solidFill>
+                  <a:srgbClr val="0B3D91"/>
+                </a:solidFill>
+                <a:latin typeface="Times New Roman" panose="02020603050405020304" charset="0"/>
+                <a:ea typeface="Montserrat"/>
+                <a:cs typeface="Times New Roman" panose="02020603050405020304" charset="0"/>
+                <a:sym typeface="Montserrat"/>
+              </a:rPr>
+              <a:t> </a:t>
+            </a:r>
+            <a:r>
+              <a:rPr lang="en-US" sz="3600" b="1" i="0" u="none" strike="noStrike" cap="none" dirty="0" err="1">
+                <a:solidFill>
+                  <a:srgbClr val="0B3D91"/>
+                </a:solidFill>
+                <a:latin typeface="Times New Roman" panose="02020603050405020304" charset="0"/>
+                <a:ea typeface="Montserrat"/>
+                <a:cs typeface="Times New Roman" panose="02020603050405020304" charset="0"/>
+                <a:sym typeface="Montserrat"/>
+              </a:rPr>
+              <a:t>информационной</a:t>
+            </a:r>
+            <a:r>
+              <a:rPr lang="en-US" sz="3600" b="1" i="0" u="none" strike="noStrike" cap="none" dirty="0">
+                <a:solidFill>
+                  <a:srgbClr val="0B3D91"/>
+                </a:solidFill>
+                <a:latin typeface="Times New Roman" panose="02020603050405020304" charset="0"/>
+                <a:ea typeface="Montserrat"/>
+                <a:cs typeface="Times New Roman" panose="02020603050405020304" charset="0"/>
+                <a:sym typeface="Montserrat"/>
+              </a:rPr>
+              <a:t> </a:t>
+            </a:r>
+            <a:r>
+              <a:rPr lang="en-US" sz="3600" b="1" i="0" u="none" strike="noStrike" cap="none" dirty="0" err="1">
+                <a:solidFill>
+                  <a:srgbClr val="0B3D91"/>
+                </a:solidFill>
+                <a:latin typeface="Times New Roman" panose="02020603050405020304" charset="0"/>
+                <a:ea typeface="Montserrat"/>
+                <a:cs typeface="Times New Roman" panose="02020603050405020304" charset="0"/>
+                <a:sym typeface="Montserrat"/>
+              </a:rPr>
+              <a:t>системы</a:t>
+            </a:r>
+            <a:r>
+              <a:rPr lang="en-US" sz="3600" b="1" i="0" u="none" strike="noStrike" cap="none" dirty="0">
+                <a:solidFill>
+                  <a:srgbClr val="0B3D91"/>
+                </a:solidFill>
+                <a:latin typeface="Times New Roman" panose="02020603050405020304" charset="0"/>
+                <a:ea typeface="Montserrat"/>
+                <a:cs typeface="Times New Roman" panose="02020603050405020304" charset="0"/>
+                <a:sym typeface="Montserrat"/>
+              </a:rPr>
+              <a:t> </a:t>
+            </a:r>
+            <a:endParaRPr lang="ru-RU" sz="3600" b="1" i="0" u="none" strike="noStrike" cap="none" dirty="0">
+              <a:solidFill>
+                <a:srgbClr val="0B3D91"/>
+              </a:solidFill>
+              <a:latin typeface="Times New Roman" panose="02020603050405020304" charset="0"/>
+              <a:ea typeface="Montserrat"/>
+              <a:cs typeface="Times New Roman" panose="02020603050405020304" charset="0"/>
+              <a:sym typeface="Montserrat"/>
+            </a:endParaRPr>
+          </a:p>
+          <a:p>
+            <a:pPr marL="0" marR="0" lvl="0" indent="0" algn="ctr" rtl="0">
+              <a:spcBef>
+                <a:spcPts val="0"/>
+              </a:spcBef>
+              <a:spcAft>
+                <a:spcPts val="0"/>
+              </a:spcAft>
+              <a:buNone/>
+            </a:pPr>
+            <a:r>
+              <a:rPr lang="en-US" sz="3600" b="1" i="0" u="none" strike="noStrike" cap="none" dirty="0" err="1">
+                <a:solidFill>
+                  <a:srgbClr val="0B3D91"/>
+                </a:solidFill>
+                <a:latin typeface="Times New Roman" panose="02020603050405020304" charset="0"/>
+                <a:ea typeface="Montserrat"/>
+                <a:cs typeface="Times New Roman" panose="02020603050405020304" charset="0"/>
+                <a:sym typeface="Montserrat"/>
+              </a:rPr>
+              <a:t>учета</a:t>
+            </a:r>
+            <a:r>
+              <a:rPr lang="en-US" sz="3600" b="1" i="0" u="none" strike="noStrike" cap="none" dirty="0">
+                <a:solidFill>
+                  <a:srgbClr val="0B3D91"/>
+                </a:solidFill>
+                <a:latin typeface="Times New Roman" panose="02020603050405020304" charset="0"/>
+                <a:ea typeface="Montserrat"/>
+                <a:cs typeface="Times New Roman" panose="02020603050405020304" charset="0"/>
+                <a:sym typeface="Montserrat"/>
+              </a:rPr>
+              <a:t> </a:t>
+            </a:r>
+            <a:r>
+              <a:rPr lang="ru-RU" sz="3600" b="1" dirty="0">
+                <a:solidFill>
+                  <a:srgbClr val="0B3D91"/>
+                </a:solidFill>
+                <a:latin typeface="Times New Roman" panose="02020603050405020304" charset="0"/>
+                <a:ea typeface="Montserrat"/>
+                <a:cs typeface="Times New Roman" panose="02020603050405020304" charset="0"/>
+                <a:sym typeface="Montserrat"/>
+              </a:rPr>
+              <a:t>доноров и управления запасами компонентов крови отделения заготовки крови №1 ФЛ ГУЗ «СОСПК»</a:t>
+            </a:r>
+            <a:endParaRPr lang="en-US" sz="3600" b="1" i="0" u="none" strike="noStrike" cap="none" dirty="0">
               <a:solidFill>
                 <a:srgbClr val="0B3D91"/>
               </a:solidFill>
@@ -11136,8 +11595,8 @@
         </p:nvSpPr>
         <p:spPr>
           <a:xfrm>
-            <a:off x="571500" y="4419600"/>
-            <a:ext cx="11049000" cy="368935"/>
+            <a:off x="7067551" y="4263747"/>
+            <a:ext cx="4714874" cy="2100575"/>
           </a:xfrm>
           <a:prstGeom prst="rect">
             <a:avLst/>
@@ -11153,9 +11612,9 @@
           </a:bodyPr>
           <a:lstStyle/>
           <a:p>
-            <a:pPr marL="0" marR="0" lvl="0" indent="0" algn="r" rtl="0">
+            <a:pPr marL="0" marR="0" lvl="0" indent="0" rtl="0">
               <a:lnSpc>
-                <a:spcPct val="160000"/>
+                <a:spcPct val="150000"/>
               </a:lnSpc>
               <a:spcBef>
                 <a:spcPts val="0"/>
@@ -11166,32 +11625,44 @@
               <a:buNone/>
             </a:pPr>
             <a:r>
-              <a:rPr lang="en-US" sz="1500" b="1" i="0" u="none" strike="noStrike" cap="none">
-                <a:solidFill>
-                  <a:srgbClr val="334155"/>
+              <a:rPr lang="en-US" sz="1500" b="1" i="0" u="none" strike="noStrike" cap="none" dirty="0" err="1">
+                <a:solidFill>
+                  <a:schemeClr val="tx1"/>
                 </a:solidFill>
                 <a:latin typeface="Times New Roman" panose="02020603050405020304" charset="0"/>
                 <a:ea typeface="Open Sans"/>
                 <a:cs typeface="Times New Roman" panose="02020603050405020304" charset="0"/>
                 <a:sym typeface="Open Sans"/>
               </a:rPr>
-              <a:t>Выполнил:</a:t>
+              <a:t>Выполнил</a:t>
             </a:r>
             <a:r>
-              <a:rPr lang="en-US" sz="1500" b="0" i="0" u="none" strike="noStrike" cap="none">
-                <a:solidFill>
-                  <a:srgbClr val="334155"/>
+              <a:rPr lang="en-US" sz="1500" b="1" i="0" u="none" strike="noStrike" cap="none" dirty="0">
+                <a:solidFill>
+                  <a:schemeClr val="tx1"/>
                 </a:solidFill>
                 <a:latin typeface="Times New Roman" panose="02020603050405020304" charset="0"/>
                 <a:ea typeface="Open Sans"/>
                 <a:cs typeface="Times New Roman" panose="02020603050405020304" charset="0"/>
                 <a:sym typeface="Open Sans"/>
               </a:rPr>
-              <a:t> Студент группы ИП-41.</a:t>
+              <a:t>:</a:t>
             </a:r>
-            <a:endParaRPr lang="en-US" sz="1500" b="0" i="0" u="none" strike="noStrike" cap="none">
+            <a:r>
+              <a:rPr lang="en-US" sz="1500" b="0" i="0" u="none" strike="noStrike" cap="none" dirty="0">
+                <a:solidFill>
+                  <a:schemeClr val="tx1"/>
+                </a:solidFill>
+                <a:latin typeface="Times New Roman" panose="02020603050405020304" charset="0"/>
+                <a:ea typeface="Open Sans"/>
+                <a:cs typeface="Times New Roman" panose="02020603050405020304" charset="0"/>
+                <a:sym typeface="Open Sans"/>
+              </a:rPr>
+              <a:t> </a:t>
+            </a:r>
+            <a:endParaRPr lang="ru-RU" sz="1500" b="0" i="0" u="none" strike="noStrike" cap="none" dirty="0">
               <a:solidFill>
-                <a:srgbClr val="334155"/>
+                <a:schemeClr val="tx1"/>
               </a:solidFill>
               <a:latin typeface="Times New Roman" panose="02020603050405020304" charset="0"/>
               <a:ea typeface="Open Sans"/>
@@ -11199,36 +11670,10 @@
               <a:sym typeface="Open Sans"/>
             </a:endParaRPr>
           </a:p>
-        </p:txBody>
-      </p:sp>
-      <p:sp>
-        <p:nvSpPr>
-          <p:cNvPr id="89" name="Google Shape;89;p13"/>
-          <p:cNvSpPr txBox="1"/>
-          <p:nvPr/>
-        </p:nvSpPr>
-        <p:spPr>
-          <a:xfrm>
-            <a:off x="571500" y="4914900"/>
-            <a:ext cx="11049000" cy="304800"/>
-          </a:xfrm>
-          <a:prstGeom prst="rect">
-            <a:avLst/>
-          </a:prstGeom>
-          <a:noFill/>
-          <a:ln>
-            <a:noFill/>
-          </a:ln>
-        </p:spPr>
-        <p:txBody>
-          <a:bodyPr spcFirstLastPara="1" wrap="square" lIns="0" tIns="0" rIns="0" bIns="0" anchor="t" anchorCtr="0">
-            <a:spAutoFit/>
-          </a:bodyPr>
-          <a:lstStyle/>
           <a:p>
-            <a:pPr marL="0" marR="0" lvl="0" indent="0" algn="r" rtl="0">
+            <a:pPr marL="0" marR="0" lvl="0" indent="0" rtl="0">
               <a:lnSpc>
-                <a:spcPct val="160000"/>
+                <a:spcPct val="150000"/>
               </a:lnSpc>
               <a:spcBef>
                 <a:spcPts val="0"/>
@@ -11239,9 +11684,73 @@
               <a:buNone/>
             </a:pPr>
             <a:r>
-              <a:rPr lang="en-US" sz="1500" b="1" i="0" u="none" strike="noStrike" cap="none">
-                <a:solidFill>
-                  <a:srgbClr val="334155"/>
+              <a:rPr lang="en-US" sz="1500" b="0" i="0" u="none" strike="noStrike" cap="none" dirty="0" err="1">
+                <a:solidFill>
+                  <a:schemeClr val="tx1"/>
+                </a:solidFill>
+                <a:latin typeface="Times New Roman" panose="02020603050405020304" charset="0"/>
+                <a:ea typeface="Open Sans"/>
+                <a:cs typeface="Times New Roman" panose="02020603050405020304" charset="0"/>
+                <a:sym typeface="Open Sans"/>
+              </a:rPr>
+              <a:t>Студент</a:t>
+            </a:r>
+            <a:r>
+              <a:rPr lang="en-US" sz="1500" b="0" i="0" u="none" strike="noStrike" cap="none" dirty="0">
+                <a:solidFill>
+                  <a:schemeClr val="tx1"/>
+                </a:solidFill>
+                <a:latin typeface="Times New Roman" panose="02020603050405020304" charset="0"/>
+                <a:ea typeface="Open Sans"/>
+                <a:cs typeface="Times New Roman" panose="02020603050405020304" charset="0"/>
+                <a:sym typeface="Open Sans"/>
+              </a:rPr>
+              <a:t> </a:t>
+            </a:r>
+            <a:r>
+              <a:rPr lang="en-US" sz="1500" b="0" i="0" u="none" strike="noStrike" cap="none" dirty="0" err="1">
+                <a:solidFill>
+                  <a:schemeClr val="tx1"/>
+                </a:solidFill>
+                <a:latin typeface="Times New Roman" panose="02020603050405020304" charset="0"/>
+                <a:ea typeface="Open Sans"/>
+                <a:cs typeface="Times New Roman" panose="02020603050405020304" charset="0"/>
+                <a:sym typeface="Open Sans"/>
+              </a:rPr>
+              <a:t>группы</a:t>
+            </a:r>
+            <a:r>
+              <a:rPr lang="en-US" sz="1500" b="0" i="0" u="none" strike="noStrike" cap="none" dirty="0">
+                <a:solidFill>
+                  <a:schemeClr val="tx1"/>
+                </a:solidFill>
+                <a:latin typeface="Times New Roman" panose="02020603050405020304" charset="0"/>
+                <a:ea typeface="Open Sans"/>
+                <a:cs typeface="Times New Roman" panose="02020603050405020304" charset="0"/>
+                <a:sym typeface="Open Sans"/>
+              </a:rPr>
+              <a:t> ИП-41</a:t>
+            </a:r>
+            <a:endParaRPr lang="ru-RU" sz="1500" b="0" i="0" u="none" strike="noStrike" cap="none" dirty="0">
+              <a:solidFill>
+                <a:schemeClr val="tx1"/>
+              </a:solidFill>
+              <a:latin typeface="Times New Roman" panose="02020603050405020304" charset="0"/>
+              <a:ea typeface="Open Sans"/>
+              <a:cs typeface="Times New Roman" panose="02020603050405020304" charset="0"/>
+              <a:sym typeface="Open Sans"/>
+            </a:endParaRPr>
+          </a:p>
+          <a:p>
+            <a:pPr>
+              <a:lnSpc>
+                <a:spcPct val="150000"/>
+              </a:lnSpc>
+            </a:pPr>
+            <a:r>
+              <a:rPr lang="en-US" sz="1500" b="1" dirty="0">
+                <a:solidFill>
+                  <a:schemeClr val="tx1"/>
                 </a:solidFill>
                 <a:latin typeface="Times New Roman" panose="02020603050405020304" charset="0"/>
                 <a:ea typeface="Open Sans"/>
@@ -11251,20 +11760,171 @@
               <a:t>Специальность:</a:t>
             </a:r>
             <a:r>
-              <a:rPr lang="en-US" sz="1500" b="0" i="0" u="none" strike="noStrike" cap="none">
-                <a:solidFill>
-                  <a:srgbClr val="334155"/>
+              <a:rPr lang="en-US" sz="1500" dirty="0">
+                <a:solidFill>
+                  <a:schemeClr val="tx1"/>
                 </a:solidFill>
                 <a:latin typeface="Times New Roman" panose="02020603050405020304" charset="0"/>
                 <a:ea typeface="Open Sans"/>
                 <a:cs typeface="Times New Roman" panose="02020603050405020304" charset="0"/>
                 <a:sym typeface="Open Sans"/>
               </a:rPr>
-              <a:t> 09.02.07 — Информационные системы и программирование</a:t>
+              <a:t> </a:t>
             </a:r>
-            <a:endParaRPr lang="en-US" sz="1500" b="0" i="0" u="none" strike="noStrike" cap="none">
+            <a:endParaRPr lang="ru-RU" sz="1500" dirty="0">
               <a:solidFill>
-                <a:srgbClr val="334155"/>
+                <a:schemeClr val="tx1"/>
+              </a:solidFill>
+              <a:latin typeface="Times New Roman" panose="02020603050405020304" charset="0"/>
+              <a:ea typeface="Open Sans"/>
+              <a:cs typeface="Times New Roman" panose="02020603050405020304" charset="0"/>
+              <a:sym typeface="Open Sans"/>
+            </a:endParaRPr>
+          </a:p>
+          <a:p>
+            <a:pPr>
+              <a:lnSpc>
+                <a:spcPct val="150000"/>
+              </a:lnSpc>
+            </a:pPr>
+            <a:r>
+              <a:rPr lang="en-US" sz="1500" dirty="0">
+                <a:solidFill>
+                  <a:schemeClr val="tx1"/>
+                </a:solidFill>
+                <a:latin typeface="Times New Roman" panose="02020603050405020304" charset="0"/>
+                <a:ea typeface="Open Sans"/>
+                <a:cs typeface="Times New Roman" panose="02020603050405020304" charset="0"/>
+                <a:sym typeface="Open Sans"/>
+              </a:rPr>
+              <a:t>09.02.07 </a:t>
+            </a:r>
+            <a:r>
+              <a:rPr lang="en-US" sz="1500" dirty="0" err="1">
+                <a:solidFill>
+                  <a:schemeClr val="tx1"/>
+                </a:solidFill>
+                <a:latin typeface="Times New Roman" panose="02020603050405020304" charset="0"/>
+                <a:ea typeface="Open Sans"/>
+                <a:cs typeface="Times New Roman" panose="02020603050405020304" charset="0"/>
+                <a:sym typeface="Open Sans"/>
+              </a:rPr>
+              <a:t>Информационные</a:t>
+            </a:r>
+            <a:r>
+              <a:rPr lang="en-US" sz="1500" dirty="0">
+                <a:solidFill>
+                  <a:schemeClr val="tx1"/>
+                </a:solidFill>
+                <a:latin typeface="Times New Roman" panose="02020603050405020304" charset="0"/>
+                <a:ea typeface="Open Sans"/>
+                <a:cs typeface="Times New Roman" panose="02020603050405020304" charset="0"/>
+                <a:sym typeface="Open Sans"/>
+              </a:rPr>
+              <a:t> </a:t>
+            </a:r>
+            <a:r>
+              <a:rPr lang="en-US" sz="1500" dirty="0" err="1">
+                <a:solidFill>
+                  <a:schemeClr val="tx1"/>
+                </a:solidFill>
+                <a:latin typeface="Times New Roman" panose="02020603050405020304" charset="0"/>
+                <a:ea typeface="Open Sans"/>
+                <a:cs typeface="Times New Roman" panose="02020603050405020304" charset="0"/>
+                <a:sym typeface="Open Sans"/>
+              </a:rPr>
+              <a:t>системы</a:t>
+            </a:r>
+            <a:r>
+              <a:rPr lang="en-US" sz="1500" dirty="0">
+                <a:solidFill>
+                  <a:schemeClr val="tx1"/>
+                </a:solidFill>
+                <a:latin typeface="Times New Roman" panose="02020603050405020304" charset="0"/>
+                <a:ea typeface="Open Sans"/>
+                <a:cs typeface="Times New Roman" panose="02020603050405020304" charset="0"/>
+                <a:sym typeface="Open Sans"/>
+              </a:rPr>
+              <a:t> и </a:t>
+            </a:r>
+            <a:r>
+              <a:rPr lang="en-US" sz="1500" dirty="0" err="1">
+                <a:solidFill>
+                  <a:schemeClr val="tx1"/>
+                </a:solidFill>
+                <a:latin typeface="Times New Roman" panose="02020603050405020304" charset="0"/>
+                <a:ea typeface="Open Sans"/>
+                <a:cs typeface="Times New Roman" panose="02020603050405020304" charset="0"/>
+                <a:sym typeface="Open Sans"/>
+              </a:rPr>
+              <a:t>программирование</a:t>
+            </a:r>
+            <a:endParaRPr lang="ru-RU" sz="1500" dirty="0">
+              <a:solidFill>
+                <a:schemeClr val="tx1"/>
+              </a:solidFill>
+              <a:latin typeface="Times New Roman" panose="02020603050405020304" charset="0"/>
+              <a:ea typeface="Open Sans"/>
+              <a:cs typeface="Times New Roman" panose="02020603050405020304" charset="0"/>
+              <a:sym typeface="Open Sans"/>
+            </a:endParaRPr>
+          </a:p>
+          <a:p>
+            <a:pPr>
+              <a:lnSpc>
+                <a:spcPct val="150000"/>
+              </a:lnSpc>
+            </a:pPr>
+            <a:r>
+              <a:rPr lang="ru-RU" sz="1500" b="1" dirty="0">
+                <a:solidFill>
+                  <a:schemeClr val="tx1"/>
+                </a:solidFill>
+                <a:latin typeface="Times New Roman" panose="02020603050405020304" charset="0"/>
+                <a:ea typeface="Open Sans"/>
+                <a:cs typeface="Times New Roman" panose="02020603050405020304" charset="0"/>
+                <a:sym typeface="Open Sans"/>
+              </a:rPr>
+              <a:t>Проверил:</a:t>
+            </a:r>
+            <a:r>
+              <a:rPr lang="ru-RU" sz="1500" dirty="0">
+                <a:solidFill>
+                  <a:schemeClr val="tx1"/>
+                </a:solidFill>
+                <a:latin typeface="Times New Roman" panose="02020603050405020304" charset="0"/>
+                <a:ea typeface="Open Sans"/>
+                <a:cs typeface="Times New Roman" panose="02020603050405020304" charset="0"/>
+                <a:sym typeface="Open Sans"/>
+              </a:rPr>
+              <a:t> Сухова Л.Г.</a:t>
+            </a:r>
+            <a:endParaRPr lang="en-US" sz="1500" dirty="0">
+              <a:solidFill>
+                <a:schemeClr val="tx1"/>
+              </a:solidFill>
+              <a:latin typeface="Times New Roman" panose="02020603050405020304" charset="0"/>
+              <a:ea typeface="Open Sans"/>
+              <a:cs typeface="Times New Roman" panose="02020603050405020304" charset="0"/>
+              <a:sym typeface="Open Sans"/>
+            </a:endParaRPr>
+          </a:p>
+          <a:p>
+            <a:pPr marL="0" marR="0" lvl="0" indent="0" algn="r" rtl="0">
+              <a:lnSpc>
+                <a:spcPct val="160000"/>
+              </a:lnSpc>
+              <a:spcBef>
+                <a:spcPts val="0"/>
+              </a:spcBef>
+              <a:spcAft>
+                <a:spcPts val="0"/>
+              </a:spcAft>
+              <a:buNone/>
+            </a:pPr>
+            <a:endParaRPr lang="en-US" sz="1500" b="0" i="0" u="none" strike="noStrike" cap="none" dirty="0">
+              <a:solidFill>
+                <a:schemeClr val="tx1"/>
               </a:solidFill>
               <a:latin typeface="Times New Roman" panose="02020603050405020304" charset="0"/>
               <a:ea typeface="Open Sans"/>
@@ -11282,8 +11942,8 @@
         </p:nvSpPr>
         <p:spPr>
           <a:xfrm>
-            <a:off x="571500" y="5410200"/>
-            <a:ext cx="11049000" cy="304800"/>
+            <a:off x="4514848" y="6179656"/>
+            <a:ext cx="3162299" cy="369332"/>
           </a:xfrm>
           <a:prstGeom prst="rect">
             <a:avLst/>
@@ -11299,7 +11959,7 @@
           </a:bodyPr>
           <a:lstStyle/>
           <a:p>
-            <a:pPr marL="0" marR="0" lvl="0" indent="0" algn="r" rtl="0">
+            <a:pPr marL="0" marR="0" lvl="0" indent="0" algn="ctr" rtl="0">
               <a:lnSpc>
                 <a:spcPct val="160000"/>
               </a:lnSpc>
@@ -11312,20 +11972,32 @@
               <a:buNone/>
             </a:pPr>
             <a:r>
-              <a:rPr lang="en-US" sz="1500" b="0" i="0" u="none" strike="noStrike" cap="none">
-                <a:solidFill>
-                  <a:srgbClr val="334155"/>
+              <a:rPr lang="en-US" sz="1500" b="1" i="0" u="none" strike="noStrike" cap="none" dirty="0" err="1">
+                <a:solidFill>
+                  <a:schemeClr val="tx1"/>
                 </a:solidFill>
                 <a:latin typeface="Times New Roman" panose="02020603050405020304" charset="0"/>
                 <a:ea typeface="Open Sans SemiBold"/>
                 <a:cs typeface="Times New Roman" panose="02020603050405020304" charset="0"/>
                 <a:sym typeface="Open Sans SemiBold"/>
               </a:rPr>
-              <a:t>Балашов, 2026 г.</a:t>
+              <a:t>Балашов</a:t>
             </a:r>
-            <a:endParaRPr lang="en-US" sz="1500" b="0" i="0" u="none" strike="noStrike" cap="none">
+            <a:r>
+              <a:rPr lang="en-US" sz="1500" b="1" i="0" u="none" strike="noStrike" cap="none" dirty="0">
+                <a:solidFill>
+                  <a:schemeClr val="tx1"/>
+                </a:solidFill>
+                <a:latin typeface="Times New Roman" panose="02020603050405020304" charset="0"/>
+                <a:ea typeface="Open Sans SemiBold"/>
+                <a:cs typeface="Times New Roman" panose="02020603050405020304" charset="0"/>
+                <a:sym typeface="Open Sans SemiBold"/>
+              </a:rPr>
+              <a:t>, 2026 г.</a:t>
+            </a:r>
+            <a:endParaRPr lang="en-US" sz="1500" b="1" i="0" u="none" strike="noStrike" cap="none" dirty="0">
               <a:solidFill>
-                <a:srgbClr val="334155"/>
+                <a:schemeClr val="tx1"/>
               </a:solidFill>
               <a:latin typeface="Times New Roman" panose="02020603050405020304" charset="0"/>
               <a:ea typeface="Open Sans SemiBold"/>
@@ -11348,7 +12020,7 @@
   <p:cSld>
     <p:spTree>
       <p:nvGrpSpPr>
-        <p:cNvPr id="94" name="Shape 94"/>
+        <p:cNvPr id="1" name="Shape 94"/>
         <p:cNvGrpSpPr/>
         <p:nvPr/>
       </p:nvGrpSpPr>
@@ -11721,7 +12393,7 @@
               <a:buNone/>
             </a:pPr>
             <a:r>
-              <a:rPr lang="en-US" sz="1500" b="0" i="0" u="none" strike="noStrike" cap="none">
+              <a:rPr lang="en-US" sz="1500" b="0" i="0" u="none" strike="noStrike" cap="none" dirty="0" err="1">
                 <a:solidFill>
                   <a:srgbClr val="334155"/>
                 </a:solidFill>
@@ -11730,9 +12402,213 @@
                 <a:cs typeface="Times New Roman" panose="02020603050405020304" charset="0"/>
                 <a:sym typeface="Open Sans"/>
               </a:rPr>
-              <a:t>Разработка десктопного WPF-приложения для автоматизации заготовки, карантина и выдачи гемокомпонентов.</a:t>
+              <a:t>Разработка</a:t>
             </a:r>
-            <a:endParaRPr lang="en-US" sz="1500" b="0" i="0" u="none" strike="noStrike" cap="none">
+            <a:r>
+              <a:rPr lang="en-US" sz="1500" b="0" i="0" u="none" strike="noStrike" cap="none" dirty="0">
+                <a:solidFill>
+                  <a:srgbClr val="334155"/>
+                </a:solidFill>
+                <a:latin typeface="Times New Roman" panose="02020603050405020304" charset="0"/>
+                <a:ea typeface="Open Sans"/>
+                <a:cs typeface="Times New Roman" panose="02020603050405020304" charset="0"/>
+                <a:sym typeface="Open Sans"/>
+              </a:rPr>
+              <a:t> </a:t>
+            </a:r>
+            <a:r>
+              <a:rPr lang="en-US" sz="1500" b="0" i="0" u="none" strike="noStrike" cap="none" dirty="0" err="1">
+                <a:solidFill>
+                  <a:srgbClr val="334155"/>
+                </a:solidFill>
+                <a:latin typeface="Times New Roman" panose="02020603050405020304" charset="0"/>
+                <a:ea typeface="Open Sans"/>
+                <a:cs typeface="Times New Roman" panose="02020603050405020304" charset="0"/>
+                <a:sym typeface="Open Sans"/>
+              </a:rPr>
+              <a:t>десктопного</a:t>
+            </a:r>
+            <a:r>
+              <a:rPr lang="en-US" sz="1500" b="0" i="0" u="none" strike="noStrike" cap="none" dirty="0">
+                <a:solidFill>
+                  <a:srgbClr val="334155"/>
+                </a:solidFill>
+                <a:latin typeface="Times New Roman" panose="02020603050405020304" charset="0"/>
+                <a:ea typeface="Open Sans"/>
+                <a:cs typeface="Times New Roman" panose="02020603050405020304" charset="0"/>
+                <a:sym typeface="Open Sans"/>
+              </a:rPr>
+              <a:t> WPF-</a:t>
+            </a:r>
+            <a:r>
+              <a:rPr lang="en-US" sz="1500" b="0" i="0" u="none" strike="noStrike" cap="none" dirty="0" err="1">
+                <a:solidFill>
+                  <a:srgbClr val="334155"/>
+                </a:solidFill>
+                <a:latin typeface="Times New Roman" panose="02020603050405020304" charset="0"/>
+                <a:ea typeface="Open Sans"/>
+                <a:cs typeface="Times New Roman" panose="02020603050405020304" charset="0"/>
+                <a:sym typeface="Open Sans"/>
+              </a:rPr>
+              <a:t>приложения</a:t>
+            </a:r>
+            <a:r>
+              <a:rPr lang="en-US" sz="1500" b="0" i="0" u="none" strike="noStrike" cap="none" dirty="0">
+                <a:solidFill>
+                  <a:srgbClr val="334155"/>
+                </a:solidFill>
+                <a:latin typeface="Times New Roman" panose="02020603050405020304" charset="0"/>
+                <a:ea typeface="Open Sans"/>
+                <a:cs typeface="Times New Roman" panose="02020603050405020304" charset="0"/>
+                <a:sym typeface="Open Sans"/>
+              </a:rPr>
+              <a:t> </a:t>
+            </a:r>
+            <a:r>
+              <a:rPr lang="en-US" sz="1500" b="0" i="0" u="none" strike="noStrike" cap="none" dirty="0" err="1">
+                <a:solidFill>
+                  <a:srgbClr val="334155"/>
+                </a:solidFill>
+                <a:latin typeface="Times New Roman" panose="02020603050405020304" charset="0"/>
+                <a:ea typeface="Open Sans"/>
+                <a:cs typeface="Times New Roman" panose="02020603050405020304" charset="0"/>
+                <a:sym typeface="Open Sans"/>
+              </a:rPr>
+              <a:t>для</a:t>
+            </a:r>
+            <a:r>
+              <a:rPr lang="en-US" sz="1500" b="0" i="0" u="none" strike="noStrike" cap="none" dirty="0">
+                <a:solidFill>
+                  <a:srgbClr val="334155"/>
+                </a:solidFill>
+                <a:latin typeface="Times New Roman" panose="02020603050405020304" charset="0"/>
+                <a:ea typeface="Open Sans"/>
+                <a:cs typeface="Times New Roman" panose="02020603050405020304" charset="0"/>
+                <a:sym typeface="Open Sans"/>
+              </a:rPr>
+              <a:t> </a:t>
+            </a:r>
+            <a:r>
+              <a:rPr lang="en-US" sz="1500" b="0" i="0" u="none" strike="noStrike" cap="none" dirty="0" err="1">
+                <a:solidFill>
+                  <a:srgbClr val="334155"/>
+                </a:solidFill>
+                <a:latin typeface="Times New Roman" panose="02020603050405020304" charset="0"/>
+                <a:ea typeface="Open Sans"/>
+                <a:cs typeface="Times New Roman" panose="02020603050405020304" charset="0"/>
+                <a:sym typeface="Open Sans"/>
+              </a:rPr>
+              <a:t>автоматизации</a:t>
+            </a:r>
+            <a:r>
+              <a:rPr lang="en-US" sz="1500" b="0" i="0" u="none" strike="noStrike" cap="none" dirty="0">
+                <a:solidFill>
+                  <a:srgbClr val="334155"/>
+                </a:solidFill>
+                <a:latin typeface="Times New Roman" panose="02020603050405020304" charset="0"/>
+                <a:ea typeface="Open Sans"/>
+                <a:cs typeface="Times New Roman" panose="02020603050405020304" charset="0"/>
+                <a:sym typeface="Open Sans"/>
+              </a:rPr>
+              <a:t> </a:t>
+            </a:r>
+            <a:r>
+              <a:rPr lang="en-US" sz="1500" b="0" i="0" u="none" strike="noStrike" cap="none" dirty="0" err="1">
+                <a:solidFill>
+                  <a:srgbClr val="334155"/>
+                </a:solidFill>
+                <a:latin typeface="Times New Roman" panose="02020603050405020304" charset="0"/>
+                <a:ea typeface="Open Sans"/>
+                <a:cs typeface="Times New Roman" panose="02020603050405020304" charset="0"/>
+                <a:sym typeface="Open Sans"/>
+              </a:rPr>
+              <a:t>заготовки</a:t>
+            </a:r>
+            <a:r>
+              <a:rPr lang="en-US" sz="1500" b="0" i="0" u="none" strike="noStrike" cap="none" dirty="0">
+                <a:solidFill>
+                  <a:srgbClr val="334155"/>
+                </a:solidFill>
+                <a:latin typeface="Times New Roman" panose="02020603050405020304" charset="0"/>
+                <a:ea typeface="Open Sans"/>
+                <a:cs typeface="Times New Roman" panose="02020603050405020304" charset="0"/>
+                <a:sym typeface="Open Sans"/>
+              </a:rPr>
+              <a:t>, </a:t>
+            </a:r>
+            <a:r>
+              <a:rPr lang="en-US" sz="1500" b="0" i="0" u="none" strike="noStrike" cap="none" dirty="0" err="1">
+                <a:solidFill>
+                  <a:srgbClr val="334155"/>
+                </a:solidFill>
+                <a:latin typeface="Times New Roman" panose="02020603050405020304" charset="0"/>
+                <a:ea typeface="Open Sans"/>
+                <a:cs typeface="Times New Roman" panose="02020603050405020304" charset="0"/>
+                <a:sym typeface="Open Sans"/>
+              </a:rPr>
+              <a:t>карантина</a:t>
+            </a:r>
+            <a:r>
+              <a:rPr lang="en-US" sz="1500" b="0" i="0" u="none" strike="noStrike" cap="none" dirty="0">
+                <a:solidFill>
+                  <a:srgbClr val="334155"/>
+                </a:solidFill>
+                <a:latin typeface="Times New Roman" panose="02020603050405020304" charset="0"/>
+                <a:ea typeface="Open Sans"/>
+                <a:cs typeface="Times New Roman" panose="02020603050405020304" charset="0"/>
+                <a:sym typeface="Open Sans"/>
+              </a:rPr>
+              <a:t> и </a:t>
+            </a:r>
+            <a:r>
+              <a:rPr lang="en-US" sz="1500" b="0" i="0" u="none" strike="noStrike" cap="none" dirty="0" err="1">
+                <a:solidFill>
+                  <a:srgbClr val="334155"/>
+                </a:solidFill>
+                <a:latin typeface="Times New Roman" panose="02020603050405020304" charset="0"/>
+                <a:ea typeface="Open Sans"/>
+                <a:cs typeface="Times New Roman" panose="02020603050405020304" charset="0"/>
+                <a:sym typeface="Open Sans"/>
+              </a:rPr>
+              <a:t>выдачи</a:t>
+            </a:r>
+            <a:r>
+              <a:rPr lang="en-US" sz="1500" b="0" i="0" u="none" strike="noStrike" cap="none" dirty="0">
+                <a:solidFill>
+                  <a:srgbClr val="334155"/>
+                </a:solidFill>
+                <a:latin typeface="Times New Roman" panose="02020603050405020304" charset="0"/>
+                <a:ea typeface="Open Sans"/>
+                <a:cs typeface="Times New Roman" panose="02020603050405020304" charset="0"/>
+                <a:sym typeface="Open Sans"/>
+              </a:rPr>
+              <a:t> </a:t>
+            </a:r>
+            <a:r>
+              <a:rPr lang="en-US" sz="1500" b="0" i="0" u="none" strike="noStrike" cap="none" dirty="0" err="1">
+                <a:solidFill>
+                  <a:srgbClr val="334155"/>
+                </a:solidFill>
+                <a:latin typeface="Times New Roman" panose="02020603050405020304" charset="0"/>
+                <a:ea typeface="Open Sans"/>
+                <a:cs typeface="Times New Roman" panose="02020603050405020304" charset="0"/>
+                <a:sym typeface="Open Sans"/>
+              </a:rPr>
+              <a:t>гемокомпонентов</a:t>
+            </a:r>
+            <a:r>
+              <a:rPr lang="en-US" sz="1500" b="0" i="0" u="none" strike="noStrike" cap="none" dirty="0">
+                <a:solidFill>
+                  <a:srgbClr val="334155"/>
+                </a:solidFill>
+                <a:latin typeface="Times New Roman" panose="02020603050405020304" charset="0"/>
+                <a:ea typeface="Open Sans"/>
+                <a:cs typeface="Times New Roman" panose="02020603050405020304" charset="0"/>
+                <a:sym typeface="Open Sans"/>
+              </a:rPr>
+              <a:t>.</a:t>
+            </a:r>
+            <a:endParaRPr lang="en-US" sz="1500" b="0" i="0" u="none" strike="noStrike" cap="none" dirty="0">
               <a:solidFill>
                 <a:srgbClr val="334155"/>
               </a:solidFill>
@@ -11867,7 +12743,7 @@
               <a:buNone/>
             </a:pPr>
             <a:r>
-              <a:rPr lang="en-US" sz="1500" b="0" i="0" u="none" strike="noStrike" cap="none">
+              <a:rPr lang="en-US" sz="1500" b="0" i="0" u="none" strike="noStrike" cap="none" dirty="0" err="1">
                 <a:solidFill>
                   <a:srgbClr val="334155"/>
                 </a:solidFill>
@@ -11876,9 +12752,213 @@
                 <a:cs typeface="Times New Roman" panose="02020603050405020304" charset="0"/>
                 <a:sym typeface="Open Sans"/>
               </a:rPr>
-              <a:t>Процессы учета движения биоматериалов и медицинских услуг в Центре крови г. Балашова.</a:t>
+              <a:t>Процессы</a:t>
             </a:r>
-            <a:endParaRPr lang="en-US" sz="1500" b="0" i="0" u="none" strike="noStrike" cap="none">
+            <a:r>
+              <a:rPr lang="en-US" sz="1500" b="0" i="0" u="none" strike="noStrike" cap="none" dirty="0">
+                <a:solidFill>
+                  <a:srgbClr val="334155"/>
+                </a:solidFill>
+                <a:latin typeface="Times New Roman" panose="02020603050405020304" charset="0"/>
+                <a:ea typeface="Open Sans"/>
+                <a:cs typeface="Times New Roman" panose="02020603050405020304" charset="0"/>
+                <a:sym typeface="Open Sans"/>
+              </a:rPr>
+              <a:t> </a:t>
+            </a:r>
+            <a:r>
+              <a:rPr lang="en-US" sz="1500" b="0" i="0" u="none" strike="noStrike" cap="none" dirty="0" err="1">
+                <a:solidFill>
+                  <a:srgbClr val="334155"/>
+                </a:solidFill>
+                <a:latin typeface="Times New Roman" panose="02020603050405020304" charset="0"/>
+                <a:ea typeface="Open Sans"/>
+                <a:cs typeface="Times New Roman" panose="02020603050405020304" charset="0"/>
+                <a:sym typeface="Open Sans"/>
+              </a:rPr>
+              <a:t>учета</a:t>
+            </a:r>
+            <a:r>
+              <a:rPr lang="en-US" sz="1500" b="0" i="0" u="none" strike="noStrike" cap="none" dirty="0">
+                <a:solidFill>
+                  <a:srgbClr val="334155"/>
+                </a:solidFill>
+                <a:latin typeface="Times New Roman" panose="02020603050405020304" charset="0"/>
+                <a:ea typeface="Open Sans"/>
+                <a:cs typeface="Times New Roman" panose="02020603050405020304" charset="0"/>
+                <a:sym typeface="Open Sans"/>
+              </a:rPr>
+              <a:t> </a:t>
+            </a:r>
+            <a:r>
+              <a:rPr lang="en-US" sz="1500" b="0" i="0" u="none" strike="noStrike" cap="none" dirty="0" err="1">
+                <a:solidFill>
+                  <a:srgbClr val="334155"/>
+                </a:solidFill>
+                <a:latin typeface="Times New Roman" panose="02020603050405020304" charset="0"/>
+                <a:ea typeface="Open Sans"/>
+                <a:cs typeface="Times New Roman" panose="02020603050405020304" charset="0"/>
+                <a:sym typeface="Open Sans"/>
+              </a:rPr>
+              <a:t>движения</a:t>
+            </a:r>
+            <a:r>
+              <a:rPr lang="en-US" sz="1500" b="0" i="0" u="none" strike="noStrike" cap="none" dirty="0">
+                <a:solidFill>
+                  <a:srgbClr val="334155"/>
+                </a:solidFill>
+                <a:latin typeface="Times New Roman" panose="02020603050405020304" charset="0"/>
+                <a:ea typeface="Open Sans"/>
+                <a:cs typeface="Times New Roman" panose="02020603050405020304" charset="0"/>
+                <a:sym typeface="Open Sans"/>
+              </a:rPr>
+              <a:t> </a:t>
+            </a:r>
+            <a:r>
+              <a:rPr lang="en-US" sz="1500" b="0" i="0" u="none" strike="noStrike" cap="none" dirty="0" err="1">
+                <a:solidFill>
+                  <a:srgbClr val="334155"/>
+                </a:solidFill>
+                <a:latin typeface="Times New Roman" panose="02020603050405020304" charset="0"/>
+                <a:ea typeface="Open Sans"/>
+                <a:cs typeface="Times New Roman" panose="02020603050405020304" charset="0"/>
+                <a:sym typeface="Open Sans"/>
+              </a:rPr>
+              <a:t>биоматериалов</a:t>
+            </a:r>
+            <a:r>
+              <a:rPr lang="en-US" sz="1500" b="0" i="0" u="none" strike="noStrike" cap="none" dirty="0">
+                <a:solidFill>
+                  <a:srgbClr val="334155"/>
+                </a:solidFill>
+                <a:latin typeface="Times New Roman" panose="02020603050405020304" charset="0"/>
+                <a:ea typeface="Open Sans"/>
+                <a:cs typeface="Times New Roman" panose="02020603050405020304" charset="0"/>
+                <a:sym typeface="Open Sans"/>
+              </a:rPr>
+              <a:t> и </a:t>
+            </a:r>
+            <a:r>
+              <a:rPr lang="en-US" sz="1500" b="0" i="0" u="none" strike="noStrike" cap="none" dirty="0" err="1">
+                <a:solidFill>
+                  <a:srgbClr val="334155"/>
+                </a:solidFill>
+                <a:latin typeface="Times New Roman" panose="02020603050405020304" charset="0"/>
+                <a:ea typeface="Open Sans"/>
+                <a:cs typeface="Times New Roman" panose="02020603050405020304" charset="0"/>
+                <a:sym typeface="Open Sans"/>
+              </a:rPr>
+              <a:t>медицинских</a:t>
+            </a:r>
+            <a:r>
+              <a:rPr lang="en-US" sz="1500" b="0" i="0" u="none" strike="noStrike" cap="none" dirty="0">
+                <a:solidFill>
+                  <a:srgbClr val="334155"/>
+                </a:solidFill>
+                <a:latin typeface="Times New Roman" panose="02020603050405020304" charset="0"/>
+                <a:ea typeface="Open Sans"/>
+                <a:cs typeface="Times New Roman" panose="02020603050405020304" charset="0"/>
+                <a:sym typeface="Open Sans"/>
+              </a:rPr>
+              <a:t> </a:t>
+            </a:r>
+            <a:r>
+              <a:rPr lang="en-US" sz="1500" b="0" i="0" u="none" strike="noStrike" cap="none" dirty="0" err="1">
+                <a:solidFill>
+                  <a:srgbClr val="334155"/>
+                </a:solidFill>
+                <a:latin typeface="Times New Roman" panose="02020603050405020304" charset="0"/>
+                <a:ea typeface="Open Sans"/>
+                <a:cs typeface="Times New Roman" panose="02020603050405020304" charset="0"/>
+                <a:sym typeface="Open Sans"/>
+              </a:rPr>
+              <a:t>услуг</a:t>
+            </a:r>
+            <a:r>
+              <a:rPr lang="en-US" sz="1500" b="0" i="0" u="none" strike="noStrike" cap="none" dirty="0">
+                <a:solidFill>
+                  <a:srgbClr val="334155"/>
+                </a:solidFill>
+                <a:latin typeface="Times New Roman" panose="02020603050405020304" charset="0"/>
+                <a:ea typeface="Open Sans"/>
+                <a:cs typeface="Times New Roman" panose="02020603050405020304" charset="0"/>
+                <a:sym typeface="Open Sans"/>
+              </a:rPr>
+              <a:t> в </a:t>
+            </a:r>
+            <a:r>
+              <a:rPr lang="en-US" sz="1500" b="0" i="0" u="none" strike="noStrike" cap="none" dirty="0" err="1">
+                <a:solidFill>
+                  <a:srgbClr val="334155"/>
+                </a:solidFill>
+                <a:latin typeface="Times New Roman" panose="02020603050405020304" charset="0"/>
+                <a:ea typeface="Open Sans"/>
+                <a:cs typeface="Times New Roman" panose="02020603050405020304" charset="0"/>
+                <a:sym typeface="Open Sans"/>
+              </a:rPr>
+              <a:t>Центре</a:t>
+            </a:r>
+            <a:r>
+              <a:rPr lang="en-US" sz="1500" b="0" i="0" u="none" strike="noStrike" cap="none" dirty="0">
+                <a:solidFill>
+                  <a:srgbClr val="334155"/>
+                </a:solidFill>
+                <a:latin typeface="Times New Roman" panose="02020603050405020304" charset="0"/>
+                <a:ea typeface="Open Sans"/>
+                <a:cs typeface="Times New Roman" panose="02020603050405020304" charset="0"/>
+                <a:sym typeface="Open Sans"/>
+              </a:rPr>
+              <a:t> </a:t>
+            </a:r>
+            <a:r>
+              <a:rPr lang="en-US" sz="1500" b="0" i="0" u="none" strike="noStrike" cap="none" dirty="0" err="1">
+                <a:solidFill>
+                  <a:srgbClr val="334155"/>
+                </a:solidFill>
+                <a:latin typeface="Times New Roman" panose="02020603050405020304" charset="0"/>
+                <a:ea typeface="Open Sans"/>
+                <a:cs typeface="Times New Roman" panose="02020603050405020304" charset="0"/>
+                <a:sym typeface="Open Sans"/>
+              </a:rPr>
+              <a:t>крови</a:t>
+            </a:r>
+            <a:r>
+              <a:rPr lang="en-US" sz="1500" b="0" i="0" u="none" strike="noStrike" cap="none" dirty="0">
+                <a:solidFill>
+                  <a:srgbClr val="334155"/>
+                </a:solidFill>
+                <a:latin typeface="Times New Roman" panose="02020603050405020304" charset="0"/>
+                <a:ea typeface="Open Sans"/>
+                <a:cs typeface="Times New Roman" panose="02020603050405020304" charset="0"/>
+                <a:sym typeface="Open Sans"/>
+              </a:rPr>
+              <a:t> г. </a:t>
+            </a:r>
+            <a:r>
+              <a:rPr lang="en-US" sz="1500" b="0" i="0" u="none" strike="noStrike" cap="none" dirty="0" err="1">
+                <a:solidFill>
+                  <a:srgbClr val="334155"/>
+                </a:solidFill>
+                <a:latin typeface="Times New Roman" panose="02020603050405020304" charset="0"/>
+                <a:ea typeface="Open Sans"/>
+                <a:cs typeface="Times New Roman" panose="02020603050405020304" charset="0"/>
+                <a:sym typeface="Open Sans"/>
+              </a:rPr>
+              <a:t>Балашова</a:t>
+            </a:r>
+            <a:r>
+              <a:rPr lang="en-US" sz="1500" b="0" i="0" u="none" strike="noStrike" cap="none" dirty="0">
+                <a:solidFill>
+                  <a:srgbClr val="334155"/>
+                </a:solidFill>
+                <a:latin typeface="Times New Roman" panose="02020603050405020304" charset="0"/>
+                <a:ea typeface="Open Sans"/>
+                <a:cs typeface="Times New Roman" panose="02020603050405020304" charset="0"/>
+                <a:sym typeface="Open Sans"/>
+              </a:rPr>
+              <a:t>.</a:t>
+            </a:r>
+            <a:endParaRPr lang="en-US" sz="1500" b="0" i="0" u="none" strike="noStrike" cap="none" dirty="0">
               <a:solidFill>
                 <a:srgbClr val="334155"/>
               </a:solidFill>
@@ -12049,7 +13129,7 @@
   <p:cSld>
     <p:spTree>
       <p:nvGrpSpPr>
-        <p:cNvPr id="113" name="Shape 113"/>
+        <p:cNvPr id="1" name="Shape 113"/>
         <p:cNvGrpSpPr/>
         <p:nvPr/>
       </p:nvGrpSpPr>
@@ -12378,7 +13458,7 @@
               <a:buNone/>
             </a:pPr>
             <a:r>
-              <a:rPr lang="en-US" sz="1500" b="1" i="0" u="none" strike="noStrike" cap="none">
+              <a:rPr lang="en-US" sz="1500" b="1" i="0" u="none" strike="noStrike" cap="none" dirty="0" err="1">
                 <a:solidFill>
                   <a:srgbClr val="334155"/>
                 </a:solidFill>
@@ -12387,10 +13467,10 @@
                 <a:cs typeface="Times New Roman" panose="02020603050405020304" charset="0"/>
                 <a:sym typeface="Open Sans"/>
               </a:rPr>
-              <a:t>Интерфейс:</a:t>
+              <a:t>Интерфейс</a:t>
             </a:r>
             <a:r>
-              <a:rPr lang="en-US" sz="1500" b="0" i="0" u="none" strike="noStrike" cap="none">
+              <a:rPr lang="en-US" sz="1500" b="1" i="0" u="none" strike="noStrike" cap="none" dirty="0">
                 <a:solidFill>
                   <a:srgbClr val="334155"/>
                 </a:solidFill>
@@ -12399,9 +13479,189 @@
                 <a:cs typeface="Times New Roman" panose="02020603050405020304" charset="0"/>
                 <a:sym typeface="Open Sans"/>
               </a:rPr>
-              <a:t> Создание специализированных страниц (Регистратура, Склад, Карантин, Аналитика).</a:t>
+              <a:t>:</a:t>
             </a:r>
-            <a:endParaRPr lang="en-US" sz="1500" b="0" i="0" u="none" strike="noStrike" cap="none">
+            <a:r>
+              <a:rPr lang="en-US" sz="1500" b="0" i="0" u="none" strike="noStrike" cap="none" dirty="0">
+                <a:solidFill>
+                  <a:srgbClr val="334155"/>
+                </a:solidFill>
+                <a:latin typeface="Times New Roman" panose="02020603050405020304" charset="0"/>
+                <a:ea typeface="Open Sans"/>
+                <a:cs typeface="Times New Roman" panose="02020603050405020304" charset="0"/>
+                <a:sym typeface="Open Sans"/>
+              </a:rPr>
+              <a:t> </a:t>
+            </a:r>
+            <a:r>
+              <a:rPr lang="en-US" sz="1500" b="0" i="0" u="none" strike="noStrike" cap="none" dirty="0" err="1">
+                <a:solidFill>
+                  <a:srgbClr val="334155"/>
+                </a:solidFill>
+                <a:latin typeface="Times New Roman" panose="02020603050405020304" charset="0"/>
+                <a:ea typeface="Open Sans"/>
+                <a:cs typeface="Times New Roman" panose="02020603050405020304" charset="0"/>
+                <a:sym typeface="Open Sans"/>
+              </a:rPr>
+              <a:t>Создание</a:t>
+            </a:r>
+            <a:r>
+              <a:rPr lang="en-US" sz="1500" b="0" i="0" u="none" strike="noStrike" cap="none" dirty="0">
+                <a:solidFill>
+                  <a:srgbClr val="334155"/>
+                </a:solidFill>
+                <a:latin typeface="Times New Roman" panose="02020603050405020304" charset="0"/>
+                <a:ea typeface="Open Sans"/>
+                <a:cs typeface="Times New Roman" panose="02020603050405020304" charset="0"/>
+                <a:sym typeface="Open Sans"/>
+              </a:rPr>
+              <a:t> </a:t>
+            </a:r>
+            <a:r>
+              <a:rPr lang="en-US" sz="1500" b="0" i="0" u="none" strike="noStrike" cap="none" dirty="0" err="1">
+                <a:solidFill>
+                  <a:srgbClr val="334155"/>
+                </a:solidFill>
+                <a:latin typeface="Times New Roman" panose="02020603050405020304" charset="0"/>
+                <a:ea typeface="Open Sans"/>
+                <a:cs typeface="Times New Roman" panose="02020603050405020304" charset="0"/>
+                <a:sym typeface="Open Sans"/>
+              </a:rPr>
+              <a:t>специализированных</a:t>
+            </a:r>
+            <a:r>
+              <a:rPr lang="en-US" sz="1500" b="0" i="0" u="none" strike="noStrike" cap="none" dirty="0">
+                <a:solidFill>
+                  <a:srgbClr val="334155"/>
+                </a:solidFill>
+                <a:latin typeface="Times New Roman" panose="02020603050405020304" charset="0"/>
+                <a:ea typeface="Open Sans"/>
+                <a:cs typeface="Times New Roman" panose="02020603050405020304" charset="0"/>
+                <a:sym typeface="Open Sans"/>
+              </a:rPr>
+              <a:t> </a:t>
+            </a:r>
+            <a:r>
+              <a:rPr lang="en-US" sz="1500" b="0" i="0" u="none" strike="noStrike" cap="none" dirty="0" err="1">
+                <a:solidFill>
+                  <a:srgbClr val="334155"/>
+                </a:solidFill>
+                <a:latin typeface="Times New Roman" panose="02020603050405020304" charset="0"/>
+                <a:ea typeface="Open Sans"/>
+                <a:cs typeface="Times New Roman" panose="02020603050405020304" charset="0"/>
+                <a:sym typeface="Open Sans"/>
+              </a:rPr>
+              <a:t>страниц</a:t>
+            </a:r>
+            <a:r>
+              <a:rPr lang="en-US" sz="1500" b="0" i="0" u="none" strike="noStrike" cap="none" dirty="0">
+                <a:solidFill>
+                  <a:srgbClr val="334155"/>
+                </a:solidFill>
+                <a:latin typeface="Times New Roman" panose="02020603050405020304" charset="0"/>
+                <a:ea typeface="Open Sans"/>
+                <a:cs typeface="Times New Roman" panose="02020603050405020304" charset="0"/>
+                <a:sym typeface="Open Sans"/>
+              </a:rPr>
+              <a:t> (</a:t>
+            </a:r>
+            <a:r>
+              <a:rPr lang="en-US" sz="1500" b="0" i="0" u="none" strike="noStrike" cap="none" dirty="0" err="1">
+                <a:solidFill>
+                  <a:srgbClr val="334155"/>
+                </a:solidFill>
+                <a:latin typeface="Times New Roman" panose="02020603050405020304" charset="0"/>
+                <a:ea typeface="Open Sans"/>
+                <a:cs typeface="Times New Roman" panose="02020603050405020304" charset="0"/>
+                <a:sym typeface="Open Sans"/>
+              </a:rPr>
+              <a:t>Регистратура</a:t>
+            </a:r>
+            <a:r>
+              <a:rPr lang="en-US" sz="1500" b="0" i="0" u="none" strike="noStrike" cap="none" dirty="0">
+                <a:solidFill>
+                  <a:srgbClr val="334155"/>
+                </a:solidFill>
+                <a:latin typeface="Times New Roman" panose="02020603050405020304" charset="0"/>
+                <a:ea typeface="Open Sans"/>
+                <a:cs typeface="Times New Roman" panose="02020603050405020304" charset="0"/>
+                <a:sym typeface="Open Sans"/>
+              </a:rPr>
+              <a:t>, </a:t>
+            </a:r>
+            <a:r>
+              <a:rPr lang="en-US" sz="1500" b="0" i="0" u="none" strike="noStrike" cap="none" dirty="0" err="1">
+                <a:solidFill>
+                  <a:srgbClr val="334155"/>
+                </a:solidFill>
+                <a:latin typeface="Times New Roman" panose="02020603050405020304" charset="0"/>
+                <a:ea typeface="Open Sans"/>
+                <a:cs typeface="Times New Roman" panose="02020603050405020304" charset="0"/>
+                <a:sym typeface="Open Sans"/>
+              </a:rPr>
+              <a:t>Склад</a:t>
+            </a:r>
+            <a:r>
+              <a:rPr lang="en-US" sz="1500" b="0" i="0" u="none" strike="noStrike" cap="none" dirty="0">
+                <a:solidFill>
+                  <a:srgbClr val="334155"/>
+                </a:solidFill>
+                <a:latin typeface="Times New Roman" panose="02020603050405020304" charset="0"/>
+                <a:ea typeface="Open Sans"/>
+                <a:cs typeface="Times New Roman" panose="02020603050405020304" charset="0"/>
+                <a:sym typeface="Open Sans"/>
+              </a:rPr>
+              <a:t>, </a:t>
+            </a:r>
+            <a:r>
+              <a:rPr lang="en-US" sz="1500" b="0" i="0" u="none" strike="noStrike" cap="none" dirty="0" err="1">
+                <a:solidFill>
+                  <a:srgbClr val="334155"/>
+                </a:solidFill>
+                <a:latin typeface="Times New Roman" panose="02020603050405020304" charset="0"/>
+                <a:ea typeface="Open Sans"/>
+                <a:cs typeface="Times New Roman" panose="02020603050405020304" charset="0"/>
+                <a:sym typeface="Open Sans"/>
+              </a:rPr>
+              <a:t>Карантин</a:t>
+            </a:r>
+            <a:r>
+              <a:rPr lang="en-US" sz="1500" b="0" i="0" u="none" strike="noStrike" cap="none" dirty="0">
+                <a:solidFill>
+                  <a:srgbClr val="334155"/>
+                </a:solidFill>
+                <a:latin typeface="Times New Roman" panose="02020603050405020304" charset="0"/>
+                <a:ea typeface="Open Sans"/>
+                <a:cs typeface="Times New Roman" panose="02020603050405020304" charset="0"/>
+                <a:sym typeface="Open Sans"/>
+              </a:rPr>
+              <a:t>, </a:t>
+            </a:r>
+            <a:r>
+              <a:rPr lang="en-US" sz="1500" b="0" i="0" u="none" strike="noStrike" cap="none" dirty="0" err="1">
+                <a:solidFill>
+                  <a:srgbClr val="334155"/>
+                </a:solidFill>
+                <a:latin typeface="Times New Roman" panose="02020603050405020304" charset="0"/>
+                <a:ea typeface="Open Sans"/>
+                <a:cs typeface="Times New Roman" panose="02020603050405020304" charset="0"/>
+                <a:sym typeface="Open Sans"/>
+              </a:rPr>
+              <a:t>Аналитика</a:t>
+            </a:r>
+            <a:r>
+              <a:rPr lang="en-US" sz="1500" b="0" i="0" u="none" strike="noStrike" cap="none" dirty="0">
+                <a:solidFill>
+                  <a:srgbClr val="334155"/>
+                </a:solidFill>
+                <a:latin typeface="Times New Roman" panose="02020603050405020304" charset="0"/>
+                <a:ea typeface="Open Sans"/>
+                <a:cs typeface="Times New Roman" panose="02020603050405020304" charset="0"/>
+                <a:sym typeface="Open Sans"/>
+              </a:rPr>
+              <a:t>).</a:t>
+            </a:r>
+            <a:endParaRPr lang="en-US" sz="1500" b="0" i="0" u="none" strike="noStrike" cap="none" dirty="0">
               <a:solidFill>
                 <a:srgbClr val="334155"/>
               </a:solidFill>
@@ -12707,7 +13967,684 @@
   <p:cSld>
     <p:spTree>
       <p:nvGrpSpPr>
-        <p:cNvPr id="130" name="Shape 130"/>
+        <p:cNvPr id="149" name="Shape 149"/>
+        <p:cNvGrpSpPr/>
+        <p:nvPr/>
+      </p:nvGrpSpPr>
+      <p:grpSpPr>
+        <a:xfrm>
+          <a:off x="0" y="0"/>
+          <a:ext cx="0" cy="0"/>
+          <a:chOff x="0" y="0"/>
+          <a:chExt cx="0" cy="0"/>
+        </a:xfrm>
+      </p:grpSpPr>
+      <p:pic>
+        <p:nvPicPr>
+          <p:cNvPr id="150" name="Google Shape;150;p17" descr="image.png"/>
+          <p:cNvPicPr preferRelativeResize="0"/>
+          <p:nvPr/>
+        </p:nvPicPr>
+        <p:blipFill rotWithShape="1">
+          <a:blip r:embed="rId1"/>
+          <a:srcRect/>
+          <a:stretch>
+            <a:fillRect/>
+          </a:stretch>
+        </p:blipFill>
+        <p:spPr>
+          <a:xfrm>
+            <a:off x="19050" y="0"/>
+            <a:ext cx="12192000" cy="6858000"/>
+          </a:xfrm>
+          <a:prstGeom prst="rect">
+            <a:avLst/>
+          </a:prstGeom>
+          <a:noFill/>
+          <a:ln>
+            <a:noFill/>
+          </a:ln>
+        </p:spPr>
+      </p:pic>
+      <p:pic>
+        <p:nvPicPr>
+          <p:cNvPr id="151" name="Google Shape;151;p17" descr="image.png"/>
+          <p:cNvPicPr preferRelativeResize="0"/>
+          <p:nvPr/>
+        </p:nvPicPr>
+        <p:blipFill rotWithShape="1">
+          <a:blip r:embed="rId2"/>
+          <a:srcRect/>
+          <a:stretch>
+            <a:fillRect/>
+          </a:stretch>
+        </p:blipFill>
+        <p:spPr>
+          <a:xfrm>
+            <a:off x="590550" y="2152650"/>
+            <a:ext cx="3492549" cy="3590925"/>
+          </a:xfrm>
+          <a:prstGeom prst="rect">
+            <a:avLst/>
+          </a:prstGeom>
+          <a:noFill/>
+          <a:ln>
+            <a:noFill/>
+          </a:ln>
+        </p:spPr>
+      </p:pic>
+      <p:pic>
+        <p:nvPicPr>
+          <p:cNvPr id="152" name="Google Shape;152;p17" descr="image.png"/>
+          <p:cNvPicPr preferRelativeResize="0"/>
+          <p:nvPr/>
+        </p:nvPicPr>
+        <p:blipFill rotWithShape="1">
+          <a:blip r:embed="rId3"/>
+          <a:srcRect/>
+          <a:stretch>
+            <a:fillRect/>
+          </a:stretch>
+        </p:blipFill>
+        <p:spPr>
+          <a:xfrm>
+            <a:off x="4368849" y="2152650"/>
+            <a:ext cx="3492549" cy="3590925"/>
+          </a:xfrm>
+          <a:prstGeom prst="rect">
+            <a:avLst/>
+          </a:prstGeom>
+          <a:noFill/>
+          <a:ln>
+            <a:noFill/>
+          </a:ln>
+        </p:spPr>
+      </p:pic>
+      <p:pic>
+        <p:nvPicPr>
+          <p:cNvPr id="153" name="Google Shape;153;p17" descr="image.png"/>
+          <p:cNvPicPr preferRelativeResize="0"/>
+          <p:nvPr/>
+        </p:nvPicPr>
+        <p:blipFill rotWithShape="1">
+          <a:blip r:embed="rId4"/>
+          <a:srcRect/>
+          <a:stretch>
+            <a:fillRect/>
+          </a:stretch>
+        </p:blipFill>
+        <p:spPr>
+          <a:xfrm>
+            <a:off x="8147149" y="2152650"/>
+            <a:ext cx="3492549" cy="3590925"/>
+          </a:xfrm>
+          <a:prstGeom prst="rect">
+            <a:avLst/>
+          </a:prstGeom>
+          <a:noFill/>
+          <a:ln>
+            <a:noFill/>
+          </a:ln>
+        </p:spPr>
+      </p:pic>
+      <p:sp>
+        <p:nvSpPr>
+          <p:cNvPr id="154" name="Google Shape;154;p17"/>
+          <p:cNvSpPr txBox="1"/>
+          <p:nvPr/>
+        </p:nvSpPr>
+        <p:spPr>
+          <a:xfrm>
+            <a:off x="590550" y="571500"/>
+            <a:ext cx="11601450" cy="484505"/>
+          </a:xfrm>
+          <a:prstGeom prst="rect">
+            <a:avLst/>
+          </a:prstGeom>
+          <a:noFill/>
+          <a:ln>
+            <a:noFill/>
+          </a:ln>
+        </p:spPr>
+        <p:txBody>
+          <a:bodyPr spcFirstLastPara="1" wrap="square" lIns="0" tIns="0" rIns="0" bIns="0" anchor="t" anchorCtr="0">
+            <a:spAutoFit/>
+          </a:bodyPr>
+          <a:lstStyle/>
+          <a:p>
+            <a:pPr marL="0" marR="0" lvl="0" indent="0" algn="l" rtl="0">
+              <a:spcBef>
+                <a:spcPts val="0"/>
+              </a:spcBef>
+              <a:spcAft>
+                <a:spcPts val="0"/>
+              </a:spcAft>
+              <a:buNone/>
+            </a:pPr>
+            <a:r>
+              <a:rPr lang="en-US" sz="3150" b="1" i="0" u="none" strike="noStrike" cap="none">
+                <a:solidFill>
+                  <a:srgbClr val="0F172A"/>
+                </a:solidFill>
+                <a:latin typeface="Times New Roman" panose="02020603050405020304" charset="0"/>
+                <a:ea typeface="Montserrat"/>
+                <a:cs typeface="Times New Roman" panose="02020603050405020304" charset="0"/>
+                <a:sym typeface="Montserrat"/>
+              </a:rPr>
+              <a:t>Актуальность и проблемы учета</a:t>
+            </a:r>
+            <a:endParaRPr lang="en-US" sz="3150" b="1" i="0" u="none" strike="noStrike" cap="none">
+              <a:solidFill>
+                <a:srgbClr val="0F172A"/>
+              </a:solidFill>
+              <a:latin typeface="Times New Roman" panose="02020603050405020304" charset="0"/>
+              <a:ea typeface="Montserrat"/>
+              <a:cs typeface="Times New Roman" panose="02020603050405020304" charset="0"/>
+              <a:sym typeface="Montserrat"/>
+            </a:endParaRPr>
+          </a:p>
+        </p:txBody>
+      </p:sp>
+      <p:sp>
+        <p:nvSpPr>
+          <p:cNvPr id="155" name="Google Shape;155;p17"/>
+          <p:cNvSpPr/>
+          <p:nvPr/>
+        </p:nvSpPr>
+        <p:spPr>
+          <a:xfrm>
+            <a:off x="590550" y="1209675"/>
+            <a:ext cx="11049000" cy="19050"/>
+          </a:xfrm>
+          <a:prstGeom prst="rect">
+            <a:avLst/>
+          </a:prstGeom>
+          <a:solidFill>
+            <a:srgbClr val="E2E8F0"/>
+          </a:solidFill>
+          <a:ln>
+            <a:noFill/>
+          </a:ln>
+        </p:spPr>
+        <p:txBody>
+          <a:bodyPr spcFirstLastPara="1" wrap="square" lIns="91425" tIns="45700" rIns="91425" bIns="45700" anchor="ctr" anchorCtr="0">
+            <a:noAutofit/>
+          </a:bodyPr>
+          <a:lstStyle/>
+          <a:p>
+            <a:pPr marL="0" marR="0" lvl="0" indent="0" algn="ctr" rtl="0">
+              <a:spcBef>
+                <a:spcPts val="0"/>
+              </a:spcBef>
+              <a:spcAft>
+                <a:spcPts val="0"/>
+              </a:spcAft>
+              <a:buNone/>
+            </a:pPr>
+            <a:endParaRPr sz="1800" b="0" i="0" u="none" strike="noStrike" cap="none">
+              <a:solidFill>
+                <a:schemeClr val="dk1"/>
+              </a:solidFill>
+              <a:latin typeface="Times New Roman" panose="02020603050405020304" charset="0"/>
+              <a:ea typeface="Calibri" panose="020F0502020204030204"/>
+              <a:cs typeface="Times New Roman" panose="02020603050405020304" charset="0"/>
+              <a:sym typeface="Calibri" panose="020F0502020204030204"/>
+            </a:endParaRPr>
+          </a:p>
+        </p:txBody>
+      </p:sp>
+      <p:pic>
+        <p:nvPicPr>
+          <p:cNvPr id="156" name="Google Shape;156;p17" descr="image.png"/>
+          <p:cNvPicPr preferRelativeResize="0"/>
+          <p:nvPr/>
+        </p:nvPicPr>
+        <p:blipFill rotWithShape="1">
+          <a:blip r:embed="rId5"/>
+          <a:srcRect/>
+          <a:stretch>
+            <a:fillRect/>
+          </a:stretch>
+        </p:blipFill>
+        <p:spPr>
+          <a:xfrm>
+            <a:off x="923925" y="2533650"/>
+            <a:ext cx="2825799" cy="342900"/>
+          </a:xfrm>
+          <a:prstGeom prst="rect">
+            <a:avLst/>
+          </a:prstGeom>
+          <a:noFill/>
+          <a:ln>
+            <a:noFill/>
+          </a:ln>
+        </p:spPr>
+      </p:pic>
+      <p:sp>
+        <p:nvSpPr>
+          <p:cNvPr id="157" name="Google Shape;157;p17"/>
+          <p:cNvSpPr txBox="1"/>
+          <p:nvPr/>
+        </p:nvSpPr>
+        <p:spPr>
+          <a:xfrm>
+            <a:off x="923925" y="3114675"/>
+            <a:ext cx="2967089" cy="552450"/>
+          </a:xfrm>
+          <a:prstGeom prst="rect">
+            <a:avLst/>
+          </a:prstGeom>
+          <a:noFill/>
+          <a:ln>
+            <a:noFill/>
+          </a:ln>
+        </p:spPr>
+        <p:txBody>
+          <a:bodyPr spcFirstLastPara="1" wrap="square" lIns="0" tIns="0" rIns="0" bIns="0" anchor="t" anchorCtr="0">
+            <a:spAutoFit/>
+          </a:bodyPr>
+          <a:lstStyle/>
+          <a:p>
+            <a:pPr marL="0" marR="0" lvl="0" indent="0" algn="l" rtl="0">
+              <a:spcBef>
+                <a:spcPts val="0"/>
+              </a:spcBef>
+              <a:spcAft>
+                <a:spcPts val="0"/>
+              </a:spcAft>
+              <a:buNone/>
+            </a:pPr>
+            <a:r>
+              <a:rPr lang="en-US" sz="1800" b="1" i="0" u="none" strike="noStrike" cap="none">
+                <a:solidFill>
+                  <a:srgbClr val="0B3D91"/>
+                </a:solidFill>
+                <a:latin typeface="Times New Roman" panose="02020603050405020304" charset="0"/>
+                <a:ea typeface="Montserrat"/>
+                <a:cs typeface="Times New Roman" panose="02020603050405020304" charset="0"/>
+                <a:sym typeface="Montserrat"/>
+              </a:rPr>
+              <a:t>Риски бумажного учета</a:t>
+            </a:r>
+            <a:endParaRPr lang="en-US" sz="1800" b="1" i="0" u="none" strike="noStrike" cap="none">
+              <a:solidFill>
+                <a:srgbClr val="0B3D91"/>
+              </a:solidFill>
+              <a:latin typeface="Times New Roman" panose="02020603050405020304" charset="0"/>
+              <a:ea typeface="Montserrat"/>
+              <a:cs typeface="Times New Roman" panose="02020603050405020304" charset="0"/>
+              <a:sym typeface="Montserrat"/>
+            </a:endParaRPr>
+          </a:p>
+        </p:txBody>
+      </p:sp>
+      <p:sp>
+        <p:nvSpPr>
+          <p:cNvPr id="158" name="Google Shape;158;p17"/>
+          <p:cNvSpPr txBox="1"/>
+          <p:nvPr/>
+        </p:nvSpPr>
+        <p:spPr>
+          <a:xfrm>
+            <a:off x="923925" y="4000500"/>
+            <a:ext cx="2825799" cy="1219200"/>
+          </a:xfrm>
+          <a:prstGeom prst="rect">
+            <a:avLst/>
+          </a:prstGeom>
+          <a:noFill/>
+          <a:ln>
+            <a:noFill/>
+          </a:ln>
+        </p:spPr>
+        <p:txBody>
+          <a:bodyPr spcFirstLastPara="1" wrap="square" lIns="0" tIns="0" rIns="0" bIns="0" anchor="t" anchorCtr="0">
+            <a:spAutoFit/>
+          </a:bodyPr>
+          <a:lstStyle/>
+          <a:p>
+            <a:pPr marL="0" marR="0" lvl="0" indent="0" algn="l" rtl="0">
+              <a:lnSpc>
+                <a:spcPct val="160000"/>
+              </a:lnSpc>
+              <a:spcBef>
+                <a:spcPts val="0"/>
+              </a:spcBef>
+              <a:spcAft>
+                <a:spcPts val="0"/>
+              </a:spcAft>
+              <a:buNone/>
+            </a:pPr>
+            <a:r>
+              <a:rPr lang="en-US" sz="1500" b="0" i="0" u="none" strike="noStrike" cap="none">
+                <a:solidFill>
+                  <a:srgbClr val="334155"/>
+                </a:solidFill>
+                <a:latin typeface="Times New Roman" panose="02020603050405020304" charset="0"/>
+                <a:ea typeface="Open Sans"/>
+                <a:cs typeface="Times New Roman" panose="02020603050405020304" charset="0"/>
+                <a:sym typeface="Open Sans"/>
+              </a:rPr>
+              <a:t>Высокая вероятность человеческого фактора при контроле сроков годности и групп крови.</a:t>
+            </a:r>
+            <a:endParaRPr lang="en-US" sz="1500" b="0" i="0" u="none" strike="noStrike" cap="none">
+              <a:solidFill>
+                <a:srgbClr val="334155"/>
+              </a:solidFill>
+              <a:latin typeface="Times New Roman" panose="02020603050405020304" charset="0"/>
+              <a:ea typeface="Open Sans"/>
+              <a:cs typeface="Times New Roman" panose="02020603050405020304" charset="0"/>
+              <a:sym typeface="Open Sans"/>
+            </a:endParaRPr>
+          </a:p>
+        </p:txBody>
+      </p:sp>
+      <p:pic>
+        <p:nvPicPr>
+          <p:cNvPr id="159" name="Google Shape;159;p17" descr="image.png"/>
+          <p:cNvPicPr preferRelativeResize="0"/>
+          <p:nvPr/>
+        </p:nvPicPr>
+        <p:blipFill rotWithShape="1">
+          <a:blip r:embed="rId6"/>
+          <a:srcRect/>
+          <a:stretch>
+            <a:fillRect/>
+          </a:stretch>
+        </p:blipFill>
+        <p:spPr>
+          <a:xfrm>
+            <a:off x="4702224" y="2533650"/>
+            <a:ext cx="2825799" cy="342900"/>
+          </a:xfrm>
+          <a:prstGeom prst="rect">
+            <a:avLst/>
+          </a:prstGeom>
+          <a:noFill/>
+          <a:ln>
+            <a:noFill/>
+          </a:ln>
+        </p:spPr>
+      </p:pic>
+      <p:sp>
+        <p:nvSpPr>
+          <p:cNvPr id="160" name="Google Shape;160;p17"/>
+          <p:cNvSpPr txBox="1"/>
+          <p:nvPr/>
+        </p:nvSpPr>
+        <p:spPr>
+          <a:xfrm>
+            <a:off x="4702224" y="3114675"/>
+            <a:ext cx="2967089" cy="276225"/>
+          </a:xfrm>
+          <a:prstGeom prst="rect">
+            <a:avLst/>
+          </a:prstGeom>
+          <a:noFill/>
+          <a:ln>
+            <a:noFill/>
+          </a:ln>
+        </p:spPr>
+        <p:txBody>
+          <a:bodyPr spcFirstLastPara="1" wrap="square" lIns="0" tIns="0" rIns="0" bIns="0" anchor="t" anchorCtr="0">
+            <a:spAutoFit/>
+          </a:bodyPr>
+          <a:lstStyle/>
+          <a:p>
+            <a:pPr marL="0" marR="0" lvl="0" indent="0" algn="l" rtl="0">
+              <a:spcBef>
+                <a:spcPts val="0"/>
+              </a:spcBef>
+              <a:spcAft>
+                <a:spcPts val="0"/>
+              </a:spcAft>
+              <a:buNone/>
+            </a:pPr>
+            <a:r>
+              <a:rPr lang="en-US" sz="1800" b="1" i="0" u="none" strike="noStrike" cap="none">
+                <a:solidFill>
+                  <a:srgbClr val="0B3D91"/>
+                </a:solidFill>
+                <a:latin typeface="Times New Roman" panose="02020603050405020304" charset="0"/>
+                <a:ea typeface="Montserrat"/>
+                <a:cs typeface="Times New Roman" panose="02020603050405020304" charset="0"/>
+                <a:sym typeface="Montserrat"/>
+              </a:rPr>
+              <a:t>Сложность контроля</a:t>
+            </a:r>
+            <a:endParaRPr lang="en-US" sz="1800" b="1" i="0" u="none" strike="noStrike" cap="none">
+              <a:solidFill>
+                <a:srgbClr val="0B3D91"/>
+              </a:solidFill>
+              <a:latin typeface="Times New Roman" panose="02020603050405020304" charset="0"/>
+              <a:ea typeface="Montserrat"/>
+              <a:cs typeface="Times New Roman" panose="02020603050405020304" charset="0"/>
+              <a:sym typeface="Montserrat"/>
+            </a:endParaRPr>
+          </a:p>
+        </p:txBody>
+      </p:sp>
+      <p:sp>
+        <p:nvSpPr>
+          <p:cNvPr id="161" name="Google Shape;161;p17"/>
+          <p:cNvSpPr txBox="1"/>
+          <p:nvPr/>
+        </p:nvSpPr>
+        <p:spPr>
+          <a:xfrm>
+            <a:off x="4702224" y="3724275"/>
+            <a:ext cx="2825799" cy="1219200"/>
+          </a:xfrm>
+          <a:prstGeom prst="rect">
+            <a:avLst/>
+          </a:prstGeom>
+          <a:noFill/>
+          <a:ln>
+            <a:noFill/>
+          </a:ln>
+        </p:spPr>
+        <p:txBody>
+          <a:bodyPr spcFirstLastPara="1" wrap="square" lIns="0" tIns="0" rIns="0" bIns="0" anchor="t" anchorCtr="0">
+            <a:spAutoFit/>
+          </a:bodyPr>
+          <a:lstStyle/>
+          <a:p>
+            <a:pPr marL="0" marR="0" lvl="0" indent="0" algn="l" rtl="0">
+              <a:lnSpc>
+                <a:spcPct val="160000"/>
+              </a:lnSpc>
+              <a:spcBef>
+                <a:spcPts val="0"/>
+              </a:spcBef>
+              <a:spcAft>
+                <a:spcPts val="0"/>
+              </a:spcAft>
+              <a:buNone/>
+            </a:pPr>
+            <a:r>
+              <a:rPr lang="en-US" sz="1500" b="0" i="0" u="none" strike="noStrike" cap="none">
+                <a:solidFill>
+                  <a:srgbClr val="334155"/>
+                </a:solidFill>
+                <a:latin typeface="Times New Roman" panose="02020603050405020304" charset="0"/>
+                <a:ea typeface="Open Sans"/>
+                <a:cs typeface="Times New Roman" panose="02020603050405020304" charset="0"/>
+                <a:sym typeface="Open Sans"/>
+              </a:rPr>
+              <a:t>Трудоемкий ручной расчет периодов карантина плазмы (180 дней), риск ошибочной выдачи.</a:t>
+            </a:r>
+            <a:endParaRPr lang="en-US" sz="1500" b="0" i="0" u="none" strike="noStrike" cap="none">
+              <a:solidFill>
+                <a:srgbClr val="334155"/>
+              </a:solidFill>
+              <a:latin typeface="Times New Roman" panose="02020603050405020304" charset="0"/>
+              <a:ea typeface="Open Sans"/>
+              <a:cs typeface="Times New Roman" panose="02020603050405020304" charset="0"/>
+              <a:sym typeface="Open Sans"/>
+            </a:endParaRPr>
+          </a:p>
+        </p:txBody>
+      </p:sp>
+      <p:pic>
+        <p:nvPicPr>
+          <p:cNvPr id="162" name="Google Shape;162;p17" descr="image.png"/>
+          <p:cNvPicPr preferRelativeResize="0"/>
+          <p:nvPr/>
+        </p:nvPicPr>
+        <p:blipFill rotWithShape="1">
+          <a:blip r:embed="rId7"/>
+          <a:srcRect/>
+          <a:stretch>
+            <a:fillRect/>
+          </a:stretch>
+        </p:blipFill>
+        <p:spPr>
+          <a:xfrm>
+            <a:off x="8480524" y="2533650"/>
+            <a:ext cx="2825799" cy="342900"/>
+          </a:xfrm>
+          <a:prstGeom prst="rect">
+            <a:avLst/>
+          </a:prstGeom>
+          <a:noFill/>
+          <a:ln>
+            <a:noFill/>
+          </a:ln>
+        </p:spPr>
+      </p:pic>
+      <p:sp>
+        <p:nvSpPr>
+          <p:cNvPr id="163" name="Google Shape;163;p17"/>
+          <p:cNvSpPr txBox="1"/>
+          <p:nvPr/>
+        </p:nvSpPr>
+        <p:spPr>
+          <a:xfrm>
+            <a:off x="8480524" y="3114675"/>
+            <a:ext cx="2967089" cy="276225"/>
+          </a:xfrm>
+          <a:prstGeom prst="rect">
+            <a:avLst/>
+          </a:prstGeom>
+          <a:noFill/>
+          <a:ln>
+            <a:noFill/>
+          </a:ln>
+        </p:spPr>
+        <p:txBody>
+          <a:bodyPr spcFirstLastPara="1" wrap="square" lIns="0" tIns="0" rIns="0" bIns="0" anchor="t" anchorCtr="0">
+            <a:spAutoFit/>
+          </a:bodyPr>
+          <a:lstStyle/>
+          <a:p>
+            <a:pPr marL="0" marR="0" lvl="0" indent="0" algn="l" rtl="0">
+              <a:spcBef>
+                <a:spcPts val="0"/>
+              </a:spcBef>
+              <a:spcAft>
+                <a:spcPts val="0"/>
+              </a:spcAft>
+              <a:buNone/>
+            </a:pPr>
+            <a:r>
+              <a:rPr lang="en-US" sz="1800" b="1" i="0" u="none" strike="noStrike" cap="none">
+                <a:solidFill>
+                  <a:srgbClr val="0B3D91"/>
+                </a:solidFill>
+                <a:latin typeface="Times New Roman" panose="02020603050405020304" charset="0"/>
+                <a:ea typeface="Montserrat"/>
+                <a:cs typeface="Times New Roman" panose="02020603050405020304" charset="0"/>
+                <a:sym typeface="Montserrat"/>
+              </a:rPr>
+              <a:t>Решение</a:t>
+            </a:r>
+            <a:endParaRPr lang="en-US" sz="1800" b="1" i="0" u="none" strike="noStrike" cap="none">
+              <a:solidFill>
+                <a:srgbClr val="0B3D91"/>
+              </a:solidFill>
+              <a:latin typeface="Times New Roman" panose="02020603050405020304" charset="0"/>
+              <a:ea typeface="Montserrat"/>
+              <a:cs typeface="Times New Roman" panose="02020603050405020304" charset="0"/>
+              <a:sym typeface="Montserrat"/>
+            </a:endParaRPr>
+          </a:p>
+        </p:txBody>
+      </p:sp>
+      <p:sp>
+        <p:nvSpPr>
+          <p:cNvPr id="164" name="Google Shape;164;p17"/>
+          <p:cNvSpPr txBox="1"/>
+          <p:nvPr/>
+        </p:nvSpPr>
+        <p:spPr>
+          <a:xfrm>
+            <a:off x="8480524" y="3724275"/>
+            <a:ext cx="2825799" cy="1219200"/>
+          </a:xfrm>
+          <a:prstGeom prst="rect">
+            <a:avLst/>
+          </a:prstGeom>
+          <a:noFill/>
+          <a:ln>
+            <a:noFill/>
+          </a:ln>
+        </p:spPr>
+        <p:txBody>
+          <a:bodyPr spcFirstLastPara="1" wrap="square" lIns="0" tIns="0" rIns="0" bIns="0" anchor="t" anchorCtr="0">
+            <a:spAutoFit/>
+          </a:bodyPr>
+          <a:lstStyle/>
+          <a:p>
+            <a:pPr marL="0" marR="0" lvl="0" indent="0" algn="l" rtl="0">
+              <a:lnSpc>
+                <a:spcPct val="160000"/>
+              </a:lnSpc>
+              <a:spcBef>
+                <a:spcPts val="0"/>
+              </a:spcBef>
+              <a:spcAft>
+                <a:spcPts val="0"/>
+              </a:spcAft>
+              <a:buNone/>
+            </a:pPr>
+            <a:r>
+              <a:rPr lang="en-US" sz="1500" b="0" i="0" u="none" strike="noStrike" cap="none">
+                <a:solidFill>
+                  <a:srgbClr val="334155"/>
+                </a:solidFill>
+                <a:latin typeface="Times New Roman" panose="02020603050405020304" charset="0"/>
+                <a:ea typeface="Open Sans"/>
+                <a:cs typeface="Times New Roman" panose="02020603050405020304" charset="0"/>
+                <a:sym typeface="Open Sans"/>
+              </a:rPr>
+              <a:t>Автоматическая верификация данных, дашборды аналитики и мгновенный экспорт отчетов.</a:t>
+            </a:r>
+            <a:endParaRPr lang="en-US" sz="1500" b="0" i="0" u="none" strike="noStrike" cap="none">
+              <a:solidFill>
+                <a:srgbClr val="334155"/>
+              </a:solidFill>
+              <a:latin typeface="Times New Roman" panose="02020603050405020304" charset="0"/>
+              <a:ea typeface="Open Sans"/>
+              <a:cs typeface="Times New Roman" panose="02020603050405020304" charset="0"/>
+              <a:sym typeface="Open Sans"/>
+            </a:endParaRPr>
+          </a:p>
+        </p:txBody>
+      </p:sp>
+    </p:spTree>
+  </p:cSld>
+  <p:clrMapOvr>
+    <a:masterClrMapping/>
+  </p:clrMapOvr>
+</p:sld>
+</file>
+
+<file path=ppt/slides/slide5.xml><?xml version="1.0" encoding="utf-8"?>
+<p:sld xmlns:a="http://schemas.openxmlformats.org/drawingml/2006/main" xmlns:r="http://schemas.openxmlformats.org/officeDocument/2006/relationships" xmlns:p="http://schemas.openxmlformats.org/presentationml/2006/main">
+  <p:cSld>
+    <p:spTree>
+      <p:nvGrpSpPr>
+        <p:cNvPr id="1" name="Shape 130"/>
         <p:cNvGrpSpPr/>
         <p:nvPr/>
       </p:nvGrpSpPr>
@@ -12900,7 +14837,7 @@
         <p:spPr>
           <a:xfrm>
             <a:off x="571500" y="2730847"/>
-            <a:ext cx="5238750" cy="304800"/>
+            <a:ext cx="5238750" cy="369332"/>
           </a:xfrm>
           <a:prstGeom prst="rect">
             <a:avLst/>
@@ -12929,20 +14866,80 @@
               <a:buNone/>
             </a:pPr>
             <a:r>
-              <a:rPr lang="en-US" sz="1500" b="1" i="0" u="none" strike="noStrike" cap="none">
-                <a:solidFill>
-                  <a:srgbClr val="334155"/>
+              <a:rPr lang="en-US" sz="1500" b="1" i="0" u="none" strike="noStrike" cap="none" dirty="0" err="1">
+                <a:solidFill>
+                  <a:schemeClr val="tx1"/>
                 </a:solidFill>
                 <a:latin typeface="Times New Roman" panose="02020603050405020304" charset="0"/>
                 <a:ea typeface="Open Sans"/>
                 <a:cs typeface="Times New Roman" panose="02020603050405020304" charset="0"/>
                 <a:sym typeface="Open Sans"/>
               </a:rPr>
-              <a:t>Основные этапы работы:</a:t>
+              <a:t>Основные</a:t>
             </a:r>
-            <a:endParaRPr lang="en-US" sz="1500" b="1" i="0" u="none" strike="noStrike" cap="none">
+            <a:r>
+              <a:rPr lang="en-US" sz="1500" b="1" i="0" u="none" strike="noStrike" cap="none" dirty="0">
+                <a:solidFill>
+                  <a:schemeClr val="tx1"/>
+                </a:solidFill>
+                <a:latin typeface="Times New Roman" panose="02020603050405020304" charset="0"/>
+                <a:ea typeface="Open Sans"/>
+                <a:cs typeface="Times New Roman" panose="02020603050405020304" charset="0"/>
+                <a:sym typeface="Open Sans"/>
+              </a:rPr>
+              <a:t> </a:t>
+            </a:r>
+            <a:r>
+              <a:rPr lang="en-US" sz="1500" b="1" i="0" u="none" strike="noStrike" cap="none" dirty="0" err="1">
+                <a:solidFill>
+                  <a:schemeClr val="tx1"/>
+                </a:solidFill>
+                <a:latin typeface="Times New Roman" panose="02020603050405020304" charset="0"/>
+                <a:ea typeface="Open Sans"/>
+                <a:cs typeface="Times New Roman" panose="02020603050405020304" charset="0"/>
+                <a:sym typeface="Open Sans"/>
+              </a:rPr>
+              <a:t>этапы</a:t>
+            </a:r>
+            <a:r>
+              <a:rPr lang="en-US" sz="1500" b="1" i="0" u="none" strike="noStrike" cap="none" dirty="0">
+                <a:solidFill>
+                  <a:schemeClr val="tx1"/>
+                </a:solidFill>
+                <a:latin typeface="Times New Roman" panose="02020603050405020304" charset="0"/>
+                <a:ea typeface="Open Sans"/>
+                <a:cs typeface="Times New Roman" panose="02020603050405020304" charset="0"/>
+                <a:sym typeface="Open Sans"/>
+              </a:rPr>
+              <a:t> </a:t>
+            </a:r>
+            <a:r>
+              <a:rPr lang="en-US" sz="1500" b="1" i="0" u="none" strike="noStrike" cap="none" dirty="0" err="1">
+                <a:solidFill>
+                  <a:schemeClr val="tx1"/>
+                </a:solidFill>
+                <a:latin typeface="Times New Roman" panose="02020603050405020304" charset="0"/>
+                <a:ea typeface="Open Sans"/>
+                <a:cs typeface="Times New Roman" panose="02020603050405020304" charset="0"/>
+                <a:sym typeface="Open Sans"/>
+              </a:rPr>
+              <a:t>работы</a:t>
+            </a:r>
+            <a:r>
+              <a:rPr lang="en-US" sz="1500" b="1" i="0" u="none" strike="noStrike" cap="none" dirty="0">
+                <a:solidFill>
+                  <a:schemeClr val="tx1"/>
+                </a:solidFill>
+                <a:latin typeface="Times New Roman" panose="02020603050405020304" charset="0"/>
+                <a:ea typeface="Open Sans"/>
+                <a:cs typeface="Times New Roman" panose="02020603050405020304" charset="0"/>
+                <a:sym typeface="Open Sans"/>
+              </a:rPr>
+              <a:t>:</a:t>
+            </a:r>
+            <a:endParaRPr lang="en-US" sz="1500" b="1" i="0" u="none" strike="noStrike" cap="none" dirty="0">
               <a:solidFill>
-                <a:srgbClr val="334155"/>
+                <a:schemeClr val="tx1"/>
               </a:solidFill>
               <a:latin typeface="Times New Roman" panose="02020603050405020304" charset="0"/>
               <a:ea typeface="Open Sans"/>
@@ -12961,7 +14958,7 @@
         <p:spPr>
           <a:xfrm>
             <a:off x="571500" y="4635847"/>
-            <a:ext cx="5238750" cy="548580"/>
+            <a:ext cx="5238750" cy="664797"/>
           </a:xfrm>
           <a:prstGeom prst="rect">
             <a:avLst/>
@@ -12992,7 +14989,7 @@
             <a:r>
               <a:rPr lang="en-US" sz="1350" b="0" i="1" u="none" strike="noStrike" cap="none">
                 <a:solidFill>
-                  <a:srgbClr val="334155"/>
+                  <a:schemeClr val="tx1"/>
                 </a:solidFill>
                 <a:latin typeface="Times New Roman" panose="02020603050405020304" charset="0"/>
                 <a:ea typeface="Open Sans"/>
@@ -13003,7 +15000,7 @@
             </a:r>
             <a:endParaRPr lang="en-US" sz="1350" b="0" i="1" u="none" strike="noStrike" cap="none">
               <a:solidFill>
-                <a:srgbClr val="334155"/>
+                <a:schemeClr val="tx1"/>
               </a:solidFill>
               <a:latin typeface="Times New Roman" panose="02020603050405020304" charset="0"/>
               <a:ea typeface="Open Sans"/>
@@ -13107,7 +15104,7 @@
         <p:spPr>
           <a:xfrm>
             <a:off x="762000" y="3226147"/>
-            <a:ext cx="5048250" cy="304800"/>
+            <a:ext cx="5048250" cy="369332"/>
           </a:xfrm>
           <a:prstGeom prst="rect">
             <a:avLst/>
@@ -13136,20 +15133,80 @@
               <a:buNone/>
             </a:pPr>
             <a:r>
-              <a:rPr lang="en-US" sz="1500" b="0" i="0" u="none" strike="noStrike" cap="none">
-                <a:solidFill>
-                  <a:srgbClr val="334155"/>
+              <a:rPr lang="en-US" sz="1500" b="0" i="0" u="none" strike="noStrike" cap="none" dirty="0" err="1">
+                <a:solidFill>
+                  <a:schemeClr val="tx1"/>
                 </a:solidFill>
                 <a:latin typeface="Times New Roman" panose="02020603050405020304" charset="0"/>
                 <a:ea typeface="Open Sans"/>
                 <a:cs typeface="Times New Roman" panose="02020603050405020304" charset="0"/>
                 <a:sym typeface="Open Sans"/>
               </a:rPr>
-              <a:t>Регистрация и прием доноров.</a:t>
+              <a:t>Регистрация</a:t>
             </a:r>
-            <a:endParaRPr lang="en-US" sz="1500" b="0" i="0" u="none" strike="noStrike" cap="none">
+            <a:r>
+              <a:rPr lang="en-US" sz="1500" b="0" i="0" u="none" strike="noStrike" cap="none" dirty="0">
+                <a:solidFill>
+                  <a:schemeClr val="tx1"/>
+                </a:solidFill>
+                <a:latin typeface="Times New Roman" panose="02020603050405020304" charset="0"/>
+                <a:ea typeface="Open Sans"/>
+                <a:cs typeface="Times New Roman" panose="02020603050405020304" charset="0"/>
+                <a:sym typeface="Open Sans"/>
+              </a:rPr>
+              <a:t> и </a:t>
+            </a:r>
+            <a:r>
+              <a:rPr lang="en-US" sz="1500" b="0" i="0" u="none" strike="noStrike" cap="none" dirty="0" err="1">
+                <a:solidFill>
+                  <a:schemeClr val="tx1"/>
+                </a:solidFill>
+                <a:latin typeface="Times New Roman" panose="02020603050405020304" charset="0"/>
+                <a:ea typeface="Open Sans"/>
+                <a:cs typeface="Times New Roman" panose="02020603050405020304" charset="0"/>
+                <a:sym typeface="Open Sans"/>
+              </a:rPr>
+              <a:t>прием</a:t>
+            </a:r>
+            <a:r>
+              <a:rPr lang="en-US" sz="1500" b="0" i="0" u="none" strike="noStrike" cap="none" dirty="0">
+                <a:solidFill>
+                  <a:schemeClr val="tx1"/>
+                </a:solidFill>
+                <a:latin typeface="Times New Roman" panose="02020603050405020304" charset="0"/>
+                <a:ea typeface="Open Sans"/>
+                <a:cs typeface="Times New Roman" panose="02020603050405020304" charset="0"/>
+                <a:sym typeface="Open Sans"/>
+              </a:rPr>
+              <a:t> </a:t>
+            </a:r>
+            <a:r>
+              <a:rPr lang="en-US" sz="1500" b="0" i="0" u="none" strike="noStrike" cap="none" dirty="0" err="1">
+                <a:solidFill>
+                  <a:schemeClr val="tx1"/>
+                </a:solidFill>
+                <a:latin typeface="Times New Roman" panose="02020603050405020304" charset="0"/>
+                <a:ea typeface="Open Sans"/>
+                <a:cs typeface="Times New Roman" panose="02020603050405020304" charset="0"/>
+                <a:sym typeface="Open Sans"/>
+              </a:rPr>
+              <a:t>доноров</a:t>
+            </a:r>
+            <a:r>
+              <a:rPr lang="en-US" sz="1500" b="0" i="0" u="none" strike="noStrike" cap="none" dirty="0">
+                <a:solidFill>
+                  <a:schemeClr val="tx1"/>
+                </a:solidFill>
+                <a:latin typeface="Times New Roman" panose="02020603050405020304" charset="0"/>
+                <a:ea typeface="Open Sans"/>
+                <a:cs typeface="Times New Roman" panose="02020603050405020304" charset="0"/>
+                <a:sym typeface="Open Sans"/>
+              </a:rPr>
+              <a:t>.</a:t>
+            </a:r>
+            <a:endParaRPr lang="en-US" sz="1500" b="0" i="0" u="none" strike="noStrike" cap="none" dirty="0">
               <a:solidFill>
-                <a:srgbClr val="334155"/>
+                <a:schemeClr val="tx1"/>
               </a:solidFill>
               <a:latin typeface="Times New Roman" panose="02020603050405020304" charset="0"/>
               <a:ea typeface="Open Sans"/>
@@ -13226,7 +15283,7 @@
         <p:spPr>
           <a:xfrm>
             <a:off x="762000" y="3530947"/>
-            <a:ext cx="5048250" cy="304800"/>
+            <a:ext cx="5048250" cy="369332"/>
           </a:xfrm>
           <a:prstGeom prst="rect">
             <a:avLst/>
@@ -13257,7 +15314,7 @@
             <a:r>
               <a:rPr lang="en-US" sz="1500" b="0" i="0" u="none" strike="noStrike" cap="none">
                 <a:solidFill>
-                  <a:srgbClr val="334155"/>
+                  <a:schemeClr val="tx1"/>
                 </a:solidFill>
                 <a:latin typeface="Times New Roman" panose="02020603050405020304" charset="0"/>
                 <a:ea typeface="Open Sans"/>
@@ -13268,7 +15325,7 @@
             </a:r>
             <a:endParaRPr lang="en-US" sz="1500" b="0" i="0" u="none" strike="noStrike" cap="none">
               <a:solidFill>
-                <a:srgbClr val="334155"/>
+                <a:schemeClr val="tx1"/>
               </a:solidFill>
               <a:latin typeface="Times New Roman" panose="02020603050405020304" charset="0"/>
               <a:ea typeface="Open Sans"/>
@@ -13345,7 +15402,7 @@
         <p:spPr>
           <a:xfrm>
             <a:off x="762000" y="3835747"/>
-            <a:ext cx="5048250" cy="304800"/>
+            <a:ext cx="5048250" cy="369332"/>
           </a:xfrm>
           <a:prstGeom prst="rect">
             <a:avLst/>
@@ -13374,20 +15431,104 @@
               <a:buNone/>
             </a:pPr>
             <a:r>
-              <a:rPr lang="en-US" sz="1500" b="0" i="0" u="none" strike="noStrike" cap="none">
-                <a:solidFill>
-                  <a:srgbClr val="334155"/>
+              <a:rPr lang="en-US" sz="1500" b="0" i="0" u="none" strike="noStrike" cap="none" dirty="0" err="1">
+                <a:solidFill>
+                  <a:schemeClr val="tx1"/>
                 </a:solidFill>
                 <a:latin typeface="Times New Roman" panose="02020603050405020304" charset="0"/>
                 <a:ea typeface="Open Sans"/>
                 <a:cs typeface="Times New Roman" panose="02020603050405020304" charset="0"/>
                 <a:sym typeface="Open Sans"/>
               </a:rPr>
-              <a:t>Фракционирование и хранение на складе.</a:t>
+              <a:t>Фракционирование</a:t>
             </a:r>
-            <a:endParaRPr lang="en-US" sz="1500" b="0" i="0" u="none" strike="noStrike" cap="none">
+            <a:r>
+              <a:rPr lang="en-US" sz="1500" b="0" i="0" u="none" strike="noStrike" cap="none" dirty="0">
+                <a:solidFill>
+                  <a:schemeClr val="tx1"/>
+                </a:solidFill>
+                <a:latin typeface="Times New Roman" panose="02020603050405020304" charset="0"/>
+                <a:ea typeface="Open Sans"/>
+                <a:cs typeface="Times New Roman" panose="02020603050405020304" charset="0"/>
+                <a:sym typeface="Open Sans"/>
+              </a:rPr>
+              <a:t> и </a:t>
+            </a:r>
+            <a:r>
+              <a:rPr lang="en-US" sz="1500" b="0" i="0" u="none" strike="noStrike" cap="none" dirty="0" err="1">
+                <a:solidFill>
+                  <a:schemeClr val="tx1"/>
+                </a:solidFill>
+                <a:latin typeface="Times New Roman" panose="02020603050405020304" charset="0"/>
+                <a:ea typeface="Open Sans"/>
+                <a:cs typeface="Times New Roman" panose="02020603050405020304" charset="0"/>
+                <a:sym typeface="Open Sans"/>
+              </a:rPr>
+              <a:t>хранение</a:t>
+            </a:r>
+            <a:r>
+              <a:rPr lang="en-US" sz="1500" b="0" i="0" u="none" strike="noStrike" cap="none" dirty="0">
+                <a:solidFill>
+                  <a:schemeClr val="tx1"/>
+                </a:solidFill>
+                <a:latin typeface="Times New Roman" panose="02020603050405020304" charset="0"/>
+                <a:ea typeface="Open Sans"/>
+                <a:cs typeface="Times New Roman" panose="02020603050405020304" charset="0"/>
+                <a:sym typeface="Open Sans"/>
+              </a:rPr>
+              <a:t> </a:t>
+            </a:r>
+            <a:r>
+              <a:rPr lang="en-US" sz="1500" b="0" i="0" u="none" strike="noStrike" cap="none" dirty="0" err="1">
+                <a:solidFill>
+                  <a:schemeClr val="tx1"/>
+                </a:solidFill>
+                <a:latin typeface="Times New Roman" panose="02020603050405020304" charset="0"/>
+                <a:ea typeface="Open Sans"/>
+                <a:cs typeface="Times New Roman" panose="02020603050405020304" charset="0"/>
+                <a:sym typeface="Open Sans"/>
+              </a:rPr>
+              <a:t>на</a:t>
+            </a:r>
+            <a:r>
+              <a:rPr lang="en-US" sz="1500" b="0" i="0" u="none" strike="noStrike" cap="none" dirty="0">
+                <a:solidFill>
+                  <a:schemeClr val="tx1"/>
+                </a:solidFill>
+                <a:latin typeface="Times New Roman" panose="02020603050405020304" charset="0"/>
+                <a:ea typeface="Open Sans"/>
+                <a:cs typeface="Times New Roman" panose="02020603050405020304" charset="0"/>
+                <a:sym typeface="Open Sans"/>
+              </a:rPr>
+              <a:t> </a:t>
+            </a:r>
+            <a:r>
+              <a:rPr lang="en-US" sz="1500" b="0" i="0" u="none" strike="noStrike" cap="none" dirty="0" err="1">
+                <a:solidFill>
+                  <a:schemeClr val="tx1"/>
+                </a:solidFill>
+                <a:latin typeface="Times New Roman" panose="02020603050405020304" charset="0"/>
+                <a:ea typeface="Open Sans"/>
+                <a:cs typeface="Times New Roman" panose="02020603050405020304" charset="0"/>
+                <a:sym typeface="Open Sans"/>
+              </a:rPr>
+              <a:t>складе</a:t>
+            </a:r>
+            <a:r>
+              <a:rPr lang="en-US" sz="1500" b="0" i="0" u="none" strike="noStrike" cap="none" dirty="0">
+                <a:solidFill>
+                  <a:schemeClr val="tx1"/>
+                </a:solidFill>
+                <a:latin typeface="Times New Roman" panose="02020603050405020304" charset="0"/>
+                <a:ea typeface="Open Sans"/>
+                <a:cs typeface="Times New Roman" panose="02020603050405020304" charset="0"/>
+                <a:sym typeface="Open Sans"/>
+              </a:rPr>
+              <a:t>.</a:t>
+            </a:r>
+            <a:endParaRPr lang="en-US" sz="1500" b="0" i="0" u="none" strike="noStrike" cap="none" dirty="0">
               <a:solidFill>
-                <a:srgbClr val="334155"/>
+                <a:schemeClr val="tx1"/>
               </a:solidFill>
               <a:latin typeface="Times New Roman" panose="02020603050405020304" charset="0"/>
               <a:ea typeface="Open Sans"/>
@@ -13464,7 +15605,7 @@
         <p:spPr>
           <a:xfrm>
             <a:off x="762000" y="4140547"/>
-            <a:ext cx="5048250" cy="304800"/>
+            <a:ext cx="5048250" cy="369332"/>
           </a:xfrm>
           <a:prstGeom prst="rect">
             <a:avLst/>
@@ -13493,20 +15634,80 @@
               <a:buNone/>
             </a:pPr>
             <a:r>
-              <a:rPr lang="en-US" sz="1500" b="0" i="0" u="none" strike="noStrike" cap="none">
-                <a:solidFill>
-                  <a:srgbClr val="334155"/>
+              <a:rPr lang="en-US" sz="1500" b="0" i="0" u="none" strike="noStrike" cap="none" dirty="0" err="1">
+                <a:solidFill>
+                  <a:schemeClr val="tx1"/>
                 </a:solidFill>
                 <a:latin typeface="Times New Roman" panose="02020603050405020304" charset="0"/>
                 <a:ea typeface="Open Sans"/>
                 <a:cs typeface="Times New Roman" panose="02020603050405020304" charset="0"/>
                 <a:sym typeface="Open Sans"/>
               </a:rPr>
-              <a:t>Контроль карантина и выдача в ЛПУ.</a:t>
+              <a:t>Контроль</a:t>
             </a:r>
-            <a:endParaRPr lang="en-US" sz="1500" b="0" i="0" u="none" strike="noStrike" cap="none">
+            <a:r>
+              <a:rPr lang="en-US" sz="1500" b="0" i="0" u="none" strike="noStrike" cap="none" dirty="0">
+                <a:solidFill>
+                  <a:schemeClr val="tx1"/>
+                </a:solidFill>
+                <a:latin typeface="Times New Roman" panose="02020603050405020304" charset="0"/>
+                <a:ea typeface="Open Sans"/>
+                <a:cs typeface="Times New Roman" panose="02020603050405020304" charset="0"/>
+                <a:sym typeface="Open Sans"/>
+              </a:rPr>
+              <a:t> </a:t>
+            </a:r>
+            <a:r>
+              <a:rPr lang="en-US" sz="1500" b="0" i="0" u="none" strike="noStrike" cap="none" dirty="0" err="1">
+                <a:solidFill>
+                  <a:schemeClr val="tx1"/>
+                </a:solidFill>
+                <a:latin typeface="Times New Roman" panose="02020603050405020304" charset="0"/>
+                <a:ea typeface="Open Sans"/>
+                <a:cs typeface="Times New Roman" panose="02020603050405020304" charset="0"/>
+                <a:sym typeface="Open Sans"/>
+              </a:rPr>
+              <a:t>карантина</a:t>
+            </a:r>
+            <a:r>
+              <a:rPr lang="en-US" sz="1500" b="0" i="0" u="none" strike="noStrike" cap="none" dirty="0">
+                <a:solidFill>
+                  <a:schemeClr val="tx1"/>
+                </a:solidFill>
+                <a:latin typeface="Times New Roman" panose="02020603050405020304" charset="0"/>
+                <a:ea typeface="Open Sans"/>
+                <a:cs typeface="Times New Roman" panose="02020603050405020304" charset="0"/>
+                <a:sym typeface="Open Sans"/>
+              </a:rPr>
+              <a:t> и </a:t>
+            </a:r>
+            <a:r>
+              <a:rPr lang="en-US" sz="1500" b="0" i="0" u="none" strike="noStrike" cap="none" dirty="0" err="1">
+                <a:solidFill>
+                  <a:schemeClr val="tx1"/>
+                </a:solidFill>
+                <a:latin typeface="Times New Roman" panose="02020603050405020304" charset="0"/>
+                <a:ea typeface="Open Sans"/>
+                <a:cs typeface="Times New Roman" panose="02020603050405020304" charset="0"/>
+                <a:sym typeface="Open Sans"/>
+              </a:rPr>
+              <a:t>выдача</a:t>
+            </a:r>
+            <a:r>
+              <a:rPr lang="en-US" sz="1500" b="0" i="0" u="none" strike="noStrike" cap="none" dirty="0">
+                <a:solidFill>
+                  <a:schemeClr val="tx1"/>
+                </a:solidFill>
+                <a:latin typeface="Times New Roman" panose="02020603050405020304" charset="0"/>
+                <a:ea typeface="Open Sans"/>
+                <a:cs typeface="Times New Roman" panose="02020603050405020304" charset="0"/>
+                <a:sym typeface="Open Sans"/>
+              </a:rPr>
+              <a:t> в ЛПУ.</a:t>
+            </a:r>
+            <a:endParaRPr lang="en-US" sz="1500" b="0" i="0" u="none" strike="noStrike" cap="none" dirty="0">
               <a:solidFill>
-                <a:srgbClr val="334155"/>
+                <a:schemeClr val="tx1"/>
               </a:solidFill>
               <a:latin typeface="Times New Roman" panose="02020603050405020304" charset="0"/>
               <a:ea typeface="Open Sans"/>
@@ -13524,12 +15725,12 @@
 </p:sld>
 </file>
 
-<file path=ppt/slides/slide5.xml><?xml version="1.0" encoding="utf-8"?>
+<file path=ppt/slides/slide6.xml><?xml version="1.0" encoding="utf-8"?>
 <p:sld xmlns:a="http://schemas.openxmlformats.org/drawingml/2006/main" xmlns:r="http://schemas.openxmlformats.org/officeDocument/2006/relationships" xmlns:p="http://schemas.openxmlformats.org/presentationml/2006/main">
   <p:cSld>
     <p:spTree>
       <p:nvGrpSpPr>
-        <p:cNvPr id="168" name="Shape 168"/>
+        <p:cNvPr id="1" name="Shape 168"/>
         <p:cNvGrpSpPr/>
         <p:nvPr/>
       </p:nvGrpSpPr>
@@ -14192,12 +16393,12 @@
 </p:sld>
 </file>
 
-<file path=ppt/slides/slide6.xml><?xml version="1.0" encoding="utf-8"?>
+<file path=ppt/slides/slide7.xml><?xml version="1.0" encoding="utf-8"?>
 <p:sld xmlns:a="http://schemas.openxmlformats.org/drawingml/2006/main" xmlns:r="http://schemas.openxmlformats.org/officeDocument/2006/relationships" xmlns:p="http://schemas.openxmlformats.org/presentationml/2006/main">
   <p:cSld>
     <p:spTree>
       <p:nvGrpSpPr>
-        <p:cNvPr id="187" name="Shape 187"/>
+        <p:cNvPr id="1" name="Shape 187"/>
         <p:cNvGrpSpPr/>
         <p:nvPr/>
       </p:nvGrpSpPr>
